--- a/Livrables/Quiz/quiz_rbpp_ppa-dui_2026-06-27.pptx
+++ b/Livrables/Quiz/quiz_rbpp_ppa-dui_2026-06-27.pptx
@@ -183,9 +183,31 @@
     <p:sldId id="431" r:id="rId177"/>
     <p:sldId id="432" r:id="rId178"/>
     <p:sldId id="433" r:id="rId179"/>
+    <p:sldId id="434" r:id="rId180"/>
+    <p:sldId id="435" r:id="rId181"/>
+    <p:sldId id="436" r:id="rId182"/>
+    <p:sldId id="437" r:id="rId183"/>
+    <p:sldId id="438" r:id="rId184"/>
+    <p:sldId id="439" r:id="rId185"/>
+    <p:sldId id="440" r:id="rId186"/>
+    <p:sldId id="441" r:id="rId187"/>
+    <p:sldId id="442" r:id="rId188"/>
+    <p:sldId id="443" r:id="rId189"/>
+    <p:sldId id="444" r:id="rId190"/>
+    <p:sldId id="445" r:id="rId191"/>
+    <p:sldId id="446" r:id="rId192"/>
+    <p:sldId id="447" r:id="rId193"/>
+    <p:sldId id="448" r:id="rId194"/>
+    <p:sldId id="449" r:id="rId195"/>
+    <p:sldId id="450" r:id="rId196"/>
+    <p:sldId id="451" r:id="rId197"/>
+    <p:sldId id="452" r:id="rId198"/>
+    <p:sldId id="453" r:id="rId199"/>
+    <p:sldId id="454" r:id="rId200"/>
+    <p:sldId id="455" r:id="rId201"/>
   </p:sldIdLst>
   <p:notesMasterIdLst>
-    <p:notesMasterId r:id="rId180"/>
+    <p:notesMasterId r:id="rId202"/>
   </p:notesMasterIdLst>
   <p:sldSz cx="12192000" cy="6858000"/>
   <p:notesSz cx="6858000" cy="12192000"/>
@@ -8377,6 +8399,94 @@
 </p:notes>
 </file>
 
+<file path=ppt/notesSlides/notesSlide179.xml><?xml version="1.0" encoding="utf-8"?>
+<p:notes xmlns:a="http://schemas.openxmlformats.org/drawingml/2006/main" xmlns:r="http://schemas.openxmlformats.org/officeDocument/2006/relationships" xmlns:p="http://schemas.openxmlformats.org/presentationml/2006/main">
+  <p:cSld>
+    <p:spTree>
+      <p:nvGrpSpPr>
+        <p:cNvPr id="1" name=""/>
+        <p:cNvGrpSpPr/>
+        <p:nvPr/>
+      </p:nvGrpSpPr>
+      <p:grpSpPr>
+        <a:xfrm>
+          <a:off x="0" y="0"/>
+          <a:ext cx="0" cy="0"/>
+          <a:chOff x="0" y="0"/>
+          <a:chExt cx="0" cy="0"/>
+        </a:xfrm>
+      </p:grpSpPr>
+      <p:sp>
+        <p:nvSpPr>
+          <p:cNvPr id="2" name="Slide Image Placeholder 1"/>
+          <p:cNvSpPr>
+            <a:spLocks noGrp="1" noRot="1" noChangeAspect="1"/>
+          </p:cNvSpPr>
+          <p:nvPr>
+            <p:ph type="sldImg"/>
+          </p:nvPr>
+        </p:nvSpPr>
+        <p:spPr/>
+      </p:sp>
+      <p:sp>
+        <p:nvSpPr>
+          <p:cNvPr id="3" name="Notes Placeholder 2"/>
+          <p:cNvSpPr>
+            <a:spLocks noGrp="1"/>
+          </p:cNvSpPr>
+          <p:nvPr>
+            <p:ph type="body" idx="1"/>
+          </p:nvPr>
+        </p:nvSpPr>
+        <p:spPr/>
+        <p:txBody>
+          <a:bodyPr/>
+          <a:lstStyle/>
+          <a:p>
+            <a:r>
+              <a:rPr lang="en-US" dirty="0"/>
+              <a:t/>
+            </a:r>
+            <a:endParaRPr lang="en-US" dirty="0"/>
+          </a:p>
+        </p:txBody>
+      </p:sp>
+      <p:sp>
+        <p:nvSpPr>
+          <p:cNvPr id="4" name="Slide Number Placeholder 3"/>
+          <p:cNvSpPr>
+            <a:spLocks noGrp="1"/>
+          </p:cNvSpPr>
+          <p:nvPr>
+            <p:ph type="sldNum" sz="quarter" idx="10"/>
+          </p:nvPr>
+        </p:nvSpPr>
+        <p:spPr/>
+        <p:txBody>
+          <a:bodyPr/>
+          <a:lstStyle/>
+          <a:p>
+            <a:fld id="{F7021451-1387-4CA6-816F-3879F97B5CBC}" type="slidenum">
+              <a:rPr lang="en-US"/>
+              <a:t>179</a:t>
+            </a:fld>
+            <a:endParaRPr lang="en-US"/>
+          </a:p>
+        </p:txBody>
+      </p:sp>
+    </p:spTree>
+    <p:extLst>
+      <p:ext uri="{BB962C8B-B14F-4D97-AF65-F5344CB8AC3E}">
+        <p14:creationId xmlns:p14="http://schemas.microsoft.com/office/powerpoint/2010/main" val="1024086991"/>
+      </p:ext>
+    </p:extLst>
+  </p:cSld>
+  <p:clrMapOvr>
+    <a:masterClrMapping/>
+  </p:clrMapOvr>
+</p:notes>
+</file>
+
 <file path=ppt/notesSlides/notesSlide18.xml><?xml version="1.0" encoding="utf-8"?>
 <p:notes xmlns:a="http://schemas.openxmlformats.org/drawingml/2006/main" xmlns:r="http://schemas.openxmlformats.org/officeDocument/2006/relationships" xmlns:p="http://schemas.openxmlformats.org/presentationml/2006/main">
   <p:cSld>
@@ -8447,6 +8557,886 @@
             <a:fld id="{F7021451-1387-4CA6-816F-3879F97B5CBC}" type="slidenum">
               <a:rPr lang="en-US"/>
               <a:t>18</a:t>
+            </a:fld>
+            <a:endParaRPr lang="en-US"/>
+          </a:p>
+        </p:txBody>
+      </p:sp>
+    </p:spTree>
+    <p:extLst>
+      <p:ext uri="{BB962C8B-B14F-4D97-AF65-F5344CB8AC3E}">
+        <p14:creationId xmlns:p14="http://schemas.microsoft.com/office/powerpoint/2010/main" val="1024086991"/>
+      </p:ext>
+    </p:extLst>
+  </p:cSld>
+  <p:clrMapOvr>
+    <a:masterClrMapping/>
+  </p:clrMapOvr>
+</p:notes>
+</file>
+
+<file path=ppt/notesSlides/notesSlide180.xml><?xml version="1.0" encoding="utf-8"?>
+<p:notes xmlns:a="http://schemas.openxmlformats.org/drawingml/2006/main" xmlns:r="http://schemas.openxmlformats.org/officeDocument/2006/relationships" xmlns:p="http://schemas.openxmlformats.org/presentationml/2006/main">
+  <p:cSld>
+    <p:spTree>
+      <p:nvGrpSpPr>
+        <p:cNvPr id="1" name=""/>
+        <p:cNvGrpSpPr/>
+        <p:nvPr/>
+      </p:nvGrpSpPr>
+      <p:grpSpPr>
+        <a:xfrm>
+          <a:off x="0" y="0"/>
+          <a:ext cx="0" cy="0"/>
+          <a:chOff x="0" y="0"/>
+          <a:chExt cx="0" cy="0"/>
+        </a:xfrm>
+      </p:grpSpPr>
+      <p:sp>
+        <p:nvSpPr>
+          <p:cNvPr id="2" name="Slide Image Placeholder 1"/>
+          <p:cNvSpPr>
+            <a:spLocks noGrp="1" noRot="1" noChangeAspect="1"/>
+          </p:cNvSpPr>
+          <p:nvPr>
+            <p:ph type="sldImg"/>
+          </p:nvPr>
+        </p:nvSpPr>
+        <p:spPr/>
+      </p:sp>
+      <p:sp>
+        <p:nvSpPr>
+          <p:cNvPr id="3" name="Notes Placeholder 2"/>
+          <p:cNvSpPr>
+            <a:spLocks noGrp="1"/>
+          </p:cNvSpPr>
+          <p:nvPr>
+            <p:ph type="body" idx="1"/>
+          </p:nvPr>
+        </p:nvSpPr>
+        <p:spPr/>
+        <p:txBody>
+          <a:bodyPr/>
+          <a:lstStyle/>
+          <a:p>
+            <a:r>
+              <a:rPr lang="en-US" dirty="0"/>
+              <a:t/>
+            </a:r>
+            <a:endParaRPr lang="en-US" dirty="0"/>
+          </a:p>
+        </p:txBody>
+      </p:sp>
+      <p:sp>
+        <p:nvSpPr>
+          <p:cNvPr id="4" name="Slide Number Placeholder 3"/>
+          <p:cNvSpPr>
+            <a:spLocks noGrp="1"/>
+          </p:cNvSpPr>
+          <p:nvPr>
+            <p:ph type="sldNum" sz="quarter" idx="10"/>
+          </p:nvPr>
+        </p:nvSpPr>
+        <p:spPr/>
+        <p:txBody>
+          <a:bodyPr/>
+          <a:lstStyle/>
+          <a:p>
+            <a:fld id="{F7021451-1387-4CA6-816F-3879F97B5CBC}" type="slidenum">
+              <a:rPr lang="en-US"/>
+              <a:t>180</a:t>
+            </a:fld>
+            <a:endParaRPr lang="en-US"/>
+          </a:p>
+        </p:txBody>
+      </p:sp>
+    </p:spTree>
+    <p:extLst>
+      <p:ext uri="{BB962C8B-B14F-4D97-AF65-F5344CB8AC3E}">
+        <p14:creationId xmlns:p14="http://schemas.microsoft.com/office/powerpoint/2010/main" val="1024086991"/>
+      </p:ext>
+    </p:extLst>
+  </p:cSld>
+  <p:clrMapOvr>
+    <a:masterClrMapping/>
+  </p:clrMapOvr>
+</p:notes>
+</file>
+
+<file path=ppt/notesSlides/notesSlide181.xml><?xml version="1.0" encoding="utf-8"?>
+<p:notes xmlns:a="http://schemas.openxmlformats.org/drawingml/2006/main" xmlns:r="http://schemas.openxmlformats.org/officeDocument/2006/relationships" xmlns:p="http://schemas.openxmlformats.org/presentationml/2006/main">
+  <p:cSld>
+    <p:spTree>
+      <p:nvGrpSpPr>
+        <p:cNvPr id="1" name=""/>
+        <p:cNvGrpSpPr/>
+        <p:nvPr/>
+      </p:nvGrpSpPr>
+      <p:grpSpPr>
+        <a:xfrm>
+          <a:off x="0" y="0"/>
+          <a:ext cx="0" cy="0"/>
+          <a:chOff x="0" y="0"/>
+          <a:chExt cx="0" cy="0"/>
+        </a:xfrm>
+      </p:grpSpPr>
+      <p:sp>
+        <p:nvSpPr>
+          <p:cNvPr id="2" name="Slide Image Placeholder 1"/>
+          <p:cNvSpPr>
+            <a:spLocks noGrp="1" noRot="1" noChangeAspect="1"/>
+          </p:cNvSpPr>
+          <p:nvPr>
+            <p:ph type="sldImg"/>
+          </p:nvPr>
+        </p:nvSpPr>
+        <p:spPr/>
+      </p:sp>
+      <p:sp>
+        <p:nvSpPr>
+          <p:cNvPr id="3" name="Notes Placeholder 2"/>
+          <p:cNvSpPr>
+            <a:spLocks noGrp="1"/>
+          </p:cNvSpPr>
+          <p:nvPr>
+            <p:ph type="body" idx="1"/>
+          </p:nvPr>
+        </p:nvSpPr>
+        <p:spPr/>
+        <p:txBody>
+          <a:bodyPr/>
+          <a:lstStyle/>
+          <a:p>
+            <a:r>
+              <a:rPr lang="en-US" dirty="0"/>
+              <a:t/>
+            </a:r>
+            <a:endParaRPr lang="en-US" dirty="0"/>
+          </a:p>
+        </p:txBody>
+      </p:sp>
+      <p:sp>
+        <p:nvSpPr>
+          <p:cNvPr id="4" name="Slide Number Placeholder 3"/>
+          <p:cNvSpPr>
+            <a:spLocks noGrp="1"/>
+          </p:cNvSpPr>
+          <p:nvPr>
+            <p:ph type="sldNum" sz="quarter" idx="10"/>
+          </p:nvPr>
+        </p:nvSpPr>
+        <p:spPr/>
+        <p:txBody>
+          <a:bodyPr/>
+          <a:lstStyle/>
+          <a:p>
+            <a:fld id="{F7021451-1387-4CA6-816F-3879F97B5CBC}" type="slidenum">
+              <a:rPr lang="en-US"/>
+              <a:t>181</a:t>
+            </a:fld>
+            <a:endParaRPr lang="en-US"/>
+          </a:p>
+        </p:txBody>
+      </p:sp>
+    </p:spTree>
+    <p:extLst>
+      <p:ext uri="{BB962C8B-B14F-4D97-AF65-F5344CB8AC3E}">
+        <p14:creationId xmlns:p14="http://schemas.microsoft.com/office/powerpoint/2010/main" val="1024086991"/>
+      </p:ext>
+    </p:extLst>
+  </p:cSld>
+  <p:clrMapOvr>
+    <a:masterClrMapping/>
+  </p:clrMapOvr>
+</p:notes>
+</file>
+
+<file path=ppt/notesSlides/notesSlide182.xml><?xml version="1.0" encoding="utf-8"?>
+<p:notes xmlns:a="http://schemas.openxmlformats.org/drawingml/2006/main" xmlns:r="http://schemas.openxmlformats.org/officeDocument/2006/relationships" xmlns:p="http://schemas.openxmlformats.org/presentationml/2006/main">
+  <p:cSld>
+    <p:spTree>
+      <p:nvGrpSpPr>
+        <p:cNvPr id="1" name=""/>
+        <p:cNvGrpSpPr/>
+        <p:nvPr/>
+      </p:nvGrpSpPr>
+      <p:grpSpPr>
+        <a:xfrm>
+          <a:off x="0" y="0"/>
+          <a:ext cx="0" cy="0"/>
+          <a:chOff x="0" y="0"/>
+          <a:chExt cx="0" cy="0"/>
+        </a:xfrm>
+      </p:grpSpPr>
+      <p:sp>
+        <p:nvSpPr>
+          <p:cNvPr id="2" name="Slide Image Placeholder 1"/>
+          <p:cNvSpPr>
+            <a:spLocks noGrp="1" noRot="1" noChangeAspect="1"/>
+          </p:cNvSpPr>
+          <p:nvPr>
+            <p:ph type="sldImg"/>
+          </p:nvPr>
+        </p:nvSpPr>
+        <p:spPr/>
+      </p:sp>
+      <p:sp>
+        <p:nvSpPr>
+          <p:cNvPr id="3" name="Notes Placeholder 2"/>
+          <p:cNvSpPr>
+            <a:spLocks noGrp="1"/>
+          </p:cNvSpPr>
+          <p:nvPr>
+            <p:ph type="body" idx="1"/>
+          </p:nvPr>
+        </p:nvSpPr>
+        <p:spPr/>
+        <p:txBody>
+          <a:bodyPr/>
+          <a:lstStyle/>
+          <a:p>
+            <a:r>
+              <a:rPr lang="en-US" dirty="0"/>
+              <a:t/>
+            </a:r>
+            <a:endParaRPr lang="en-US" dirty="0"/>
+          </a:p>
+        </p:txBody>
+      </p:sp>
+      <p:sp>
+        <p:nvSpPr>
+          <p:cNvPr id="4" name="Slide Number Placeholder 3"/>
+          <p:cNvSpPr>
+            <a:spLocks noGrp="1"/>
+          </p:cNvSpPr>
+          <p:nvPr>
+            <p:ph type="sldNum" sz="quarter" idx="10"/>
+          </p:nvPr>
+        </p:nvSpPr>
+        <p:spPr/>
+        <p:txBody>
+          <a:bodyPr/>
+          <a:lstStyle/>
+          <a:p>
+            <a:fld id="{F7021451-1387-4CA6-816F-3879F97B5CBC}" type="slidenum">
+              <a:rPr lang="en-US"/>
+              <a:t>182</a:t>
+            </a:fld>
+            <a:endParaRPr lang="en-US"/>
+          </a:p>
+        </p:txBody>
+      </p:sp>
+    </p:spTree>
+    <p:extLst>
+      <p:ext uri="{BB962C8B-B14F-4D97-AF65-F5344CB8AC3E}">
+        <p14:creationId xmlns:p14="http://schemas.microsoft.com/office/powerpoint/2010/main" val="1024086991"/>
+      </p:ext>
+    </p:extLst>
+  </p:cSld>
+  <p:clrMapOvr>
+    <a:masterClrMapping/>
+  </p:clrMapOvr>
+</p:notes>
+</file>
+
+<file path=ppt/notesSlides/notesSlide183.xml><?xml version="1.0" encoding="utf-8"?>
+<p:notes xmlns:a="http://schemas.openxmlformats.org/drawingml/2006/main" xmlns:r="http://schemas.openxmlformats.org/officeDocument/2006/relationships" xmlns:p="http://schemas.openxmlformats.org/presentationml/2006/main">
+  <p:cSld>
+    <p:spTree>
+      <p:nvGrpSpPr>
+        <p:cNvPr id="1" name=""/>
+        <p:cNvGrpSpPr/>
+        <p:nvPr/>
+      </p:nvGrpSpPr>
+      <p:grpSpPr>
+        <a:xfrm>
+          <a:off x="0" y="0"/>
+          <a:ext cx="0" cy="0"/>
+          <a:chOff x="0" y="0"/>
+          <a:chExt cx="0" cy="0"/>
+        </a:xfrm>
+      </p:grpSpPr>
+      <p:sp>
+        <p:nvSpPr>
+          <p:cNvPr id="2" name="Slide Image Placeholder 1"/>
+          <p:cNvSpPr>
+            <a:spLocks noGrp="1" noRot="1" noChangeAspect="1"/>
+          </p:cNvSpPr>
+          <p:nvPr>
+            <p:ph type="sldImg"/>
+          </p:nvPr>
+        </p:nvSpPr>
+        <p:spPr/>
+      </p:sp>
+      <p:sp>
+        <p:nvSpPr>
+          <p:cNvPr id="3" name="Notes Placeholder 2"/>
+          <p:cNvSpPr>
+            <a:spLocks noGrp="1"/>
+          </p:cNvSpPr>
+          <p:nvPr>
+            <p:ph type="body" idx="1"/>
+          </p:nvPr>
+        </p:nvSpPr>
+        <p:spPr/>
+        <p:txBody>
+          <a:bodyPr/>
+          <a:lstStyle/>
+          <a:p>
+            <a:r>
+              <a:rPr lang="en-US" dirty="0"/>
+              <a:t/>
+            </a:r>
+            <a:endParaRPr lang="en-US" dirty="0"/>
+          </a:p>
+        </p:txBody>
+      </p:sp>
+      <p:sp>
+        <p:nvSpPr>
+          <p:cNvPr id="4" name="Slide Number Placeholder 3"/>
+          <p:cNvSpPr>
+            <a:spLocks noGrp="1"/>
+          </p:cNvSpPr>
+          <p:nvPr>
+            <p:ph type="sldNum" sz="quarter" idx="10"/>
+          </p:nvPr>
+        </p:nvSpPr>
+        <p:spPr/>
+        <p:txBody>
+          <a:bodyPr/>
+          <a:lstStyle/>
+          <a:p>
+            <a:fld id="{F7021451-1387-4CA6-816F-3879F97B5CBC}" type="slidenum">
+              <a:rPr lang="en-US"/>
+              <a:t>183</a:t>
+            </a:fld>
+            <a:endParaRPr lang="en-US"/>
+          </a:p>
+        </p:txBody>
+      </p:sp>
+    </p:spTree>
+    <p:extLst>
+      <p:ext uri="{BB962C8B-B14F-4D97-AF65-F5344CB8AC3E}">
+        <p14:creationId xmlns:p14="http://schemas.microsoft.com/office/powerpoint/2010/main" val="1024086991"/>
+      </p:ext>
+    </p:extLst>
+  </p:cSld>
+  <p:clrMapOvr>
+    <a:masterClrMapping/>
+  </p:clrMapOvr>
+</p:notes>
+</file>
+
+<file path=ppt/notesSlides/notesSlide184.xml><?xml version="1.0" encoding="utf-8"?>
+<p:notes xmlns:a="http://schemas.openxmlformats.org/drawingml/2006/main" xmlns:r="http://schemas.openxmlformats.org/officeDocument/2006/relationships" xmlns:p="http://schemas.openxmlformats.org/presentationml/2006/main">
+  <p:cSld>
+    <p:spTree>
+      <p:nvGrpSpPr>
+        <p:cNvPr id="1" name=""/>
+        <p:cNvGrpSpPr/>
+        <p:nvPr/>
+      </p:nvGrpSpPr>
+      <p:grpSpPr>
+        <a:xfrm>
+          <a:off x="0" y="0"/>
+          <a:ext cx="0" cy="0"/>
+          <a:chOff x="0" y="0"/>
+          <a:chExt cx="0" cy="0"/>
+        </a:xfrm>
+      </p:grpSpPr>
+      <p:sp>
+        <p:nvSpPr>
+          <p:cNvPr id="2" name="Slide Image Placeholder 1"/>
+          <p:cNvSpPr>
+            <a:spLocks noGrp="1" noRot="1" noChangeAspect="1"/>
+          </p:cNvSpPr>
+          <p:nvPr>
+            <p:ph type="sldImg"/>
+          </p:nvPr>
+        </p:nvSpPr>
+        <p:spPr/>
+      </p:sp>
+      <p:sp>
+        <p:nvSpPr>
+          <p:cNvPr id="3" name="Notes Placeholder 2"/>
+          <p:cNvSpPr>
+            <a:spLocks noGrp="1"/>
+          </p:cNvSpPr>
+          <p:nvPr>
+            <p:ph type="body" idx="1"/>
+          </p:nvPr>
+        </p:nvSpPr>
+        <p:spPr/>
+        <p:txBody>
+          <a:bodyPr/>
+          <a:lstStyle/>
+          <a:p>
+            <a:r>
+              <a:rPr lang="en-US" dirty="0"/>
+              <a:t/>
+            </a:r>
+            <a:endParaRPr lang="en-US" dirty="0"/>
+          </a:p>
+        </p:txBody>
+      </p:sp>
+      <p:sp>
+        <p:nvSpPr>
+          <p:cNvPr id="4" name="Slide Number Placeholder 3"/>
+          <p:cNvSpPr>
+            <a:spLocks noGrp="1"/>
+          </p:cNvSpPr>
+          <p:nvPr>
+            <p:ph type="sldNum" sz="quarter" idx="10"/>
+          </p:nvPr>
+        </p:nvSpPr>
+        <p:spPr/>
+        <p:txBody>
+          <a:bodyPr/>
+          <a:lstStyle/>
+          <a:p>
+            <a:fld id="{F7021451-1387-4CA6-816F-3879F97B5CBC}" type="slidenum">
+              <a:rPr lang="en-US"/>
+              <a:t>184</a:t>
+            </a:fld>
+            <a:endParaRPr lang="en-US"/>
+          </a:p>
+        </p:txBody>
+      </p:sp>
+    </p:spTree>
+    <p:extLst>
+      <p:ext uri="{BB962C8B-B14F-4D97-AF65-F5344CB8AC3E}">
+        <p14:creationId xmlns:p14="http://schemas.microsoft.com/office/powerpoint/2010/main" val="1024086991"/>
+      </p:ext>
+    </p:extLst>
+  </p:cSld>
+  <p:clrMapOvr>
+    <a:masterClrMapping/>
+  </p:clrMapOvr>
+</p:notes>
+</file>
+
+<file path=ppt/notesSlides/notesSlide185.xml><?xml version="1.0" encoding="utf-8"?>
+<p:notes xmlns:a="http://schemas.openxmlformats.org/drawingml/2006/main" xmlns:r="http://schemas.openxmlformats.org/officeDocument/2006/relationships" xmlns:p="http://schemas.openxmlformats.org/presentationml/2006/main">
+  <p:cSld>
+    <p:spTree>
+      <p:nvGrpSpPr>
+        <p:cNvPr id="1" name=""/>
+        <p:cNvGrpSpPr/>
+        <p:nvPr/>
+      </p:nvGrpSpPr>
+      <p:grpSpPr>
+        <a:xfrm>
+          <a:off x="0" y="0"/>
+          <a:ext cx="0" cy="0"/>
+          <a:chOff x="0" y="0"/>
+          <a:chExt cx="0" cy="0"/>
+        </a:xfrm>
+      </p:grpSpPr>
+      <p:sp>
+        <p:nvSpPr>
+          <p:cNvPr id="2" name="Slide Image Placeholder 1"/>
+          <p:cNvSpPr>
+            <a:spLocks noGrp="1" noRot="1" noChangeAspect="1"/>
+          </p:cNvSpPr>
+          <p:nvPr>
+            <p:ph type="sldImg"/>
+          </p:nvPr>
+        </p:nvSpPr>
+        <p:spPr/>
+      </p:sp>
+      <p:sp>
+        <p:nvSpPr>
+          <p:cNvPr id="3" name="Notes Placeholder 2"/>
+          <p:cNvSpPr>
+            <a:spLocks noGrp="1"/>
+          </p:cNvSpPr>
+          <p:nvPr>
+            <p:ph type="body" idx="1"/>
+          </p:nvPr>
+        </p:nvSpPr>
+        <p:spPr/>
+        <p:txBody>
+          <a:bodyPr/>
+          <a:lstStyle/>
+          <a:p>
+            <a:r>
+              <a:rPr lang="en-US" dirty="0"/>
+              <a:t/>
+            </a:r>
+            <a:endParaRPr lang="en-US" dirty="0"/>
+          </a:p>
+        </p:txBody>
+      </p:sp>
+      <p:sp>
+        <p:nvSpPr>
+          <p:cNvPr id="4" name="Slide Number Placeholder 3"/>
+          <p:cNvSpPr>
+            <a:spLocks noGrp="1"/>
+          </p:cNvSpPr>
+          <p:nvPr>
+            <p:ph type="sldNum" sz="quarter" idx="10"/>
+          </p:nvPr>
+        </p:nvSpPr>
+        <p:spPr/>
+        <p:txBody>
+          <a:bodyPr/>
+          <a:lstStyle/>
+          <a:p>
+            <a:fld id="{F7021451-1387-4CA6-816F-3879F97B5CBC}" type="slidenum">
+              <a:rPr lang="en-US"/>
+              <a:t>185</a:t>
+            </a:fld>
+            <a:endParaRPr lang="en-US"/>
+          </a:p>
+        </p:txBody>
+      </p:sp>
+    </p:spTree>
+    <p:extLst>
+      <p:ext uri="{BB962C8B-B14F-4D97-AF65-F5344CB8AC3E}">
+        <p14:creationId xmlns:p14="http://schemas.microsoft.com/office/powerpoint/2010/main" val="1024086991"/>
+      </p:ext>
+    </p:extLst>
+  </p:cSld>
+  <p:clrMapOvr>
+    <a:masterClrMapping/>
+  </p:clrMapOvr>
+</p:notes>
+</file>
+
+<file path=ppt/notesSlides/notesSlide186.xml><?xml version="1.0" encoding="utf-8"?>
+<p:notes xmlns:a="http://schemas.openxmlformats.org/drawingml/2006/main" xmlns:r="http://schemas.openxmlformats.org/officeDocument/2006/relationships" xmlns:p="http://schemas.openxmlformats.org/presentationml/2006/main">
+  <p:cSld>
+    <p:spTree>
+      <p:nvGrpSpPr>
+        <p:cNvPr id="1" name=""/>
+        <p:cNvGrpSpPr/>
+        <p:nvPr/>
+      </p:nvGrpSpPr>
+      <p:grpSpPr>
+        <a:xfrm>
+          <a:off x="0" y="0"/>
+          <a:ext cx="0" cy="0"/>
+          <a:chOff x="0" y="0"/>
+          <a:chExt cx="0" cy="0"/>
+        </a:xfrm>
+      </p:grpSpPr>
+      <p:sp>
+        <p:nvSpPr>
+          <p:cNvPr id="2" name="Slide Image Placeholder 1"/>
+          <p:cNvSpPr>
+            <a:spLocks noGrp="1" noRot="1" noChangeAspect="1"/>
+          </p:cNvSpPr>
+          <p:nvPr>
+            <p:ph type="sldImg"/>
+          </p:nvPr>
+        </p:nvSpPr>
+        <p:spPr/>
+      </p:sp>
+      <p:sp>
+        <p:nvSpPr>
+          <p:cNvPr id="3" name="Notes Placeholder 2"/>
+          <p:cNvSpPr>
+            <a:spLocks noGrp="1"/>
+          </p:cNvSpPr>
+          <p:nvPr>
+            <p:ph type="body" idx="1"/>
+          </p:nvPr>
+        </p:nvSpPr>
+        <p:spPr/>
+        <p:txBody>
+          <a:bodyPr/>
+          <a:lstStyle/>
+          <a:p>
+            <a:r>
+              <a:rPr lang="en-US" dirty="0"/>
+              <a:t/>
+            </a:r>
+            <a:endParaRPr lang="en-US" dirty="0"/>
+          </a:p>
+        </p:txBody>
+      </p:sp>
+      <p:sp>
+        <p:nvSpPr>
+          <p:cNvPr id="4" name="Slide Number Placeholder 3"/>
+          <p:cNvSpPr>
+            <a:spLocks noGrp="1"/>
+          </p:cNvSpPr>
+          <p:nvPr>
+            <p:ph type="sldNum" sz="quarter" idx="10"/>
+          </p:nvPr>
+        </p:nvSpPr>
+        <p:spPr/>
+        <p:txBody>
+          <a:bodyPr/>
+          <a:lstStyle/>
+          <a:p>
+            <a:fld id="{F7021451-1387-4CA6-816F-3879F97B5CBC}" type="slidenum">
+              <a:rPr lang="en-US"/>
+              <a:t>186</a:t>
+            </a:fld>
+            <a:endParaRPr lang="en-US"/>
+          </a:p>
+        </p:txBody>
+      </p:sp>
+    </p:spTree>
+    <p:extLst>
+      <p:ext uri="{BB962C8B-B14F-4D97-AF65-F5344CB8AC3E}">
+        <p14:creationId xmlns:p14="http://schemas.microsoft.com/office/powerpoint/2010/main" val="1024086991"/>
+      </p:ext>
+    </p:extLst>
+  </p:cSld>
+  <p:clrMapOvr>
+    <a:masterClrMapping/>
+  </p:clrMapOvr>
+</p:notes>
+</file>
+
+<file path=ppt/notesSlides/notesSlide187.xml><?xml version="1.0" encoding="utf-8"?>
+<p:notes xmlns:a="http://schemas.openxmlformats.org/drawingml/2006/main" xmlns:r="http://schemas.openxmlformats.org/officeDocument/2006/relationships" xmlns:p="http://schemas.openxmlformats.org/presentationml/2006/main">
+  <p:cSld>
+    <p:spTree>
+      <p:nvGrpSpPr>
+        <p:cNvPr id="1" name=""/>
+        <p:cNvGrpSpPr/>
+        <p:nvPr/>
+      </p:nvGrpSpPr>
+      <p:grpSpPr>
+        <a:xfrm>
+          <a:off x="0" y="0"/>
+          <a:ext cx="0" cy="0"/>
+          <a:chOff x="0" y="0"/>
+          <a:chExt cx="0" cy="0"/>
+        </a:xfrm>
+      </p:grpSpPr>
+      <p:sp>
+        <p:nvSpPr>
+          <p:cNvPr id="2" name="Slide Image Placeholder 1"/>
+          <p:cNvSpPr>
+            <a:spLocks noGrp="1" noRot="1" noChangeAspect="1"/>
+          </p:cNvSpPr>
+          <p:nvPr>
+            <p:ph type="sldImg"/>
+          </p:nvPr>
+        </p:nvSpPr>
+        <p:spPr/>
+      </p:sp>
+      <p:sp>
+        <p:nvSpPr>
+          <p:cNvPr id="3" name="Notes Placeholder 2"/>
+          <p:cNvSpPr>
+            <a:spLocks noGrp="1"/>
+          </p:cNvSpPr>
+          <p:nvPr>
+            <p:ph type="body" idx="1"/>
+          </p:nvPr>
+        </p:nvSpPr>
+        <p:spPr/>
+        <p:txBody>
+          <a:bodyPr/>
+          <a:lstStyle/>
+          <a:p>
+            <a:r>
+              <a:rPr lang="en-US" dirty="0"/>
+              <a:t/>
+            </a:r>
+            <a:endParaRPr lang="en-US" dirty="0"/>
+          </a:p>
+        </p:txBody>
+      </p:sp>
+      <p:sp>
+        <p:nvSpPr>
+          <p:cNvPr id="4" name="Slide Number Placeholder 3"/>
+          <p:cNvSpPr>
+            <a:spLocks noGrp="1"/>
+          </p:cNvSpPr>
+          <p:nvPr>
+            <p:ph type="sldNum" sz="quarter" idx="10"/>
+          </p:nvPr>
+        </p:nvSpPr>
+        <p:spPr/>
+        <p:txBody>
+          <a:bodyPr/>
+          <a:lstStyle/>
+          <a:p>
+            <a:fld id="{F7021451-1387-4CA6-816F-3879F97B5CBC}" type="slidenum">
+              <a:rPr lang="en-US"/>
+              <a:t>187</a:t>
+            </a:fld>
+            <a:endParaRPr lang="en-US"/>
+          </a:p>
+        </p:txBody>
+      </p:sp>
+    </p:spTree>
+    <p:extLst>
+      <p:ext uri="{BB962C8B-B14F-4D97-AF65-F5344CB8AC3E}">
+        <p14:creationId xmlns:p14="http://schemas.microsoft.com/office/powerpoint/2010/main" val="1024086991"/>
+      </p:ext>
+    </p:extLst>
+  </p:cSld>
+  <p:clrMapOvr>
+    <a:masterClrMapping/>
+  </p:clrMapOvr>
+</p:notes>
+</file>
+
+<file path=ppt/notesSlides/notesSlide188.xml><?xml version="1.0" encoding="utf-8"?>
+<p:notes xmlns:a="http://schemas.openxmlformats.org/drawingml/2006/main" xmlns:r="http://schemas.openxmlformats.org/officeDocument/2006/relationships" xmlns:p="http://schemas.openxmlformats.org/presentationml/2006/main">
+  <p:cSld>
+    <p:spTree>
+      <p:nvGrpSpPr>
+        <p:cNvPr id="1" name=""/>
+        <p:cNvGrpSpPr/>
+        <p:nvPr/>
+      </p:nvGrpSpPr>
+      <p:grpSpPr>
+        <a:xfrm>
+          <a:off x="0" y="0"/>
+          <a:ext cx="0" cy="0"/>
+          <a:chOff x="0" y="0"/>
+          <a:chExt cx="0" cy="0"/>
+        </a:xfrm>
+      </p:grpSpPr>
+      <p:sp>
+        <p:nvSpPr>
+          <p:cNvPr id="2" name="Slide Image Placeholder 1"/>
+          <p:cNvSpPr>
+            <a:spLocks noGrp="1" noRot="1" noChangeAspect="1"/>
+          </p:cNvSpPr>
+          <p:nvPr>
+            <p:ph type="sldImg"/>
+          </p:nvPr>
+        </p:nvSpPr>
+        <p:spPr/>
+      </p:sp>
+      <p:sp>
+        <p:nvSpPr>
+          <p:cNvPr id="3" name="Notes Placeholder 2"/>
+          <p:cNvSpPr>
+            <a:spLocks noGrp="1"/>
+          </p:cNvSpPr>
+          <p:nvPr>
+            <p:ph type="body" idx="1"/>
+          </p:nvPr>
+        </p:nvSpPr>
+        <p:spPr/>
+        <p:txBody>
+          <a:bodyPr/>
+          <a:lstStyle/>
+          <a:p>
+            <a:r>
+              <a:rPr lang="en-US" dirty="0"/>
+              <a:t/>
+            </a:r>
+            <a:endParaRPr lang="en-US" dirty="0"/>
+          </a:p>
+        </p:txBody>
+      </p:sp>
+      <p:sp>
+        <p:nvSpPr>
+          <p:cNvPr id="4" name="Slide Number Placeholder 3"/>
+          <p:cNvSpPr>
+            <a:spLocks noGrp="1"/>
+          </p:cNvSpPr>
+          <p:nvPr>
+            <p:ph type="sldNum" sz="quarter" idx="10"/>
+          </p:nvPr>
+        </p:nvSpPr>
+        <p:spPr/>
+        <p:txBody>
+          <a:bodyPr/>
+          <a:lstStyle/>
+          <a:p>
+            <a:fld id="{F7021451-1387-4CA6-816F-3879F97B5CBC}" type="slidenum">
+              <a:rPr lang="en-US"/>
+              <a:t>188</a:t>
+            </a:fld>
+            <a:endParaRPr lang="en-US"/>
+          </a:p>
+        </p:txBody>
+      </p:sp>
+    </p:spTree>
+    <p:extLst>
+      <p:ext uri="{BB962C8B-B14F-4D97-AF65-F5344CB8AC3E}">
+        <p14:creationId xmlns:p14="http://schemas.microsoft.com/office/powerpoint/2010/main" val="1024086991"/>
+      </p:ext>
+    </p:extLst>
+  </p:cSld>
+  <p:clrMapOvr>
+    <a:masterClrMapping/>
+  </p:clrMapOvr>
+</p:notes>
+</file>
+
+<file path=ppt/notesSlides/notesSlide189.xml><?xml version="1.0" encoding="utf-8"?>
+<p:notes xmlns:a="http://schemas.openxmlformats.org/drawingml/2006/main" xmlns:r="http://schemas.openxmlformats.org/officeDocument/2006/relationships" xmlns:p="http://schemas.openxmlformats.org/presentationml/2006/main">
+  <p:cSld>
+    <p:spTree>
+      <p:nvGrpSpPr>
+        <p:cNvPr id="1" name=""/>
+        <p:cNvGrpSpPr/>
+        <p:nvPr/>
+      </p:nvGrpSpPr>
+      <p:grpSpPr>
+        <a:xfrm>
+          <a:off x="0" y="0"/>
+          <a:ext cx="0" cy="0"/>
+          <a:chOff x="0" y="0"/>
+          <a:chExt cx="0" cy="0"/>
+        </a:xfrm>
+      </p:grpSpPr>
+      <p:sp>
+        <p:nvSpPr>
+          <p:cNvPr id="2" name="Slide Image Placeholder 1"/>
+          <p:cNvSpPr>
+            <a:spLocks noGrp="1" noRot="1" noChangeAspect="1"/>
+          </p:cNvSpPr>
+          <p:nvPr>
+            <p:ph type="sldImg"/>
+          </p:nvPr>
+        </p:nvSpPr>
+        <p:spPr/>
+      </p:sp>
+      <p:sp>
+        <p:nvSpPr>
+          <p:cNvPr id="3" name="Notes Placeholder 2"/>
+          <p:cNvSpPr>
+            <a:spLocks noGrp="1"/>
+          </p:cNvSpPr>
+          <p:nvPr>
+            <p:ph type="body" idx="1"/>
+          </p:nvPr>
+        </p:nvSpPr>
+        <p:spPr/>
+        <p:txBody>
+          <a:bodyPr/>
+          <a:lstStyle/>
+          <a:p>
+            <a:r>
+              <a:rPr lang="en-US" dirty="0"/>
+              <a:t/>
+            </a:r>
+            <a:endParaRPr lang="en-US" dirty="0"/>
+          </a:p>
+        </p:txBody>
+      </p:sp>
+      <p:sp>
+        <p:nvSpPr>
+          <p:cNvPr id="4" name="Slide Number Placeholder 3"/>
+          <p:cNvSpPr>
+            <a:spLocks noGrp="1"/>
+          </p:cNvSpPr>
+          <p:nvPr>
+            <p:ph type="sldNum" sz="quarter" idx="10"/>
+          </p:nvPr>
+        </p:nvSpPr>
+        <p:spPr/>
+        <p:txBody>
+          <a:bodyPr/>
+          <a:lstStyle/>
+          <a:p>
+            <a:fld id="{F7021451-1387-4CA6-816F-3879F97B5CBC}" type="slidenum">
+              <a:rPr lang="en-US"/>
+              <a:t>189</a:t>
             </a:fld>
             <a:endParaRPr lang="en-US"/>
           </a:p>
@@ -8553,6 +9543,886 @@
 </p:notes>
 </file>
 
+<file path=ppt/notesSlides/notesSlide190.xml><?xml version="1.0" encoding="utf-8"?>
+<p:notes xmlns:a="http://schemas.openxmlformats.org/drawingml/2006/main" xmlns:r="http://schemas.openxmlformats.org/officeDocument/2006/relationships" xmlns:p="http://schemas.openxmlformats.org/presentationml/2006/main">
+  <p:cSld>
+    <p:spTree>
+      <p:nvGrpSpPr>
+        <p:cNvPr id="1" name=""/>
+        <p:cNvGrpSpPr/>
+        <p:nvPr/>
+      </p:nvGrpSpPr>
+      <p:grpSpPr>
+        <a:xfrm>
+          <a:off x="0" y="0"/>
+          <a:ext cx="0" cy="0"/>
+          <a:chOff x="0" y="0"/>
+          <a:chExt cx="0" cy="0"/>
+        </a:xfrm>
+      </p:grpSpPr>
+      <p:sp>
+        <p:nvSpPr>
+          <p:cNvPr id="2" name="Slide Image Placeholder 1"/>
+          <p:cNvSpPr>
+            <a:spLocks noGrp="1" noRot="1" noChangeAspect="1"/>
+          </p:cNvSpPr>
+          <p:nvPr>
+            <p:ph type="sldImg"/>
+          </p:nvPr>
+        </p:nvSpPr>
+        <p:spPr/>
+      </p:sp>
+      <p:sp>
+        <p:nvSpPr>
+          <p:cNvPr id="3" name="Notes Placeholder 2"/>
+          <p:cNvSpPr>
+            <a:spLocks noGrp="1"/>
+          </p:cNvSpPr>
+          <p:nvPr>
+            <p:ph type="body" idx="1"/>
+          </p:nvPr>
+        </p:nvSpPr>
+        <p:spPr/>
+        <p:txBody>
+          <a:bodyPr/>
+          <a:lstStyle/>
+          <a:p>
+            <a:r>
+              <a:rPr lang="en-US" dirty="0"/>
+              <a:t/>
+            </a:r>
+            <a:endParaRPr lang="en-US" dirty="0"/>
+          </a:p>
+        </p:txBody>
+      </p:sp>
+      <p:sp>
+        <p:nvSpPr>
+          <p:cNvPr id="4" name="Slide Number Placeholder 3"/>
+          <p:cNvSpPr>
+            <a:spLocks noGrp="1"/>
+          </p:cNvSpPr>
+          <p:nvPr>
+            <p:ph type="sldNum" sz="quarter" idx="10"/>
+          </p:nvPr>
+        </p:nvSpPr>
+        <p:spPr/>
+        <p:txBody>
+          <a:bodyPr/>
+          <a:lstStyle/>
+          <a:p>
+            <a:fld id="{F7021451-1387-4CA6-816F-3879F97B5CBC}" type="slidenum">
+              <a:rPr lang="en-US"/>
+              <a:t>190</a:t>
+            </a:fld>
+            <a:endParaRPr lang="en-US"/>
+          </a:p>
+        </p:txBody>
+      </p:sp>
+    </p:spTree>
+    <p:extLst>
+      <p:ext uri="{BB962C8B-B14F-4D97-AF65-F5344CB8AC3E}">
+        <p14:creationId xmlns:p14="http://schemas.microsoft.com/office/powerpoint/2010/main" val="1024086991"/>
+      </p:ext>
+    </p:extLst>
+  </p:cSld>
+  <p:clrMapOvr>
+    <a:masterClrMapping/>
+  </p:clrMapOvr>
+</p:notes>
+</file>
+
+<file path=ppt/notesSlides/notesSlide191.xml><?xml version="1.0" encoding="utf-8"?>
+<p:notes xmlns:a="http://schemas.openxmlformats.org/drawingml/2006/main" xmlns:r="http://schemas.openxmlformats.org/officeDocument/2006/relationships" xmlns:p="http://schemas.openxmlformats.org/presentationml/2006/main">
+  <p:cSld>
+    <p:spTree>
+      <p:nvGrpSpPr>
+        <p:cNvPr id="1" name=""/>
+        <p:cNvGrpSpPr/>
+        <p:nvPr/>
+      </p:nvGrpSpPr>
+      <p:grpSpPr>
+        <a:xfrm>
+          <a:off x="0" y="0"/>
+          <a:ext cx="0" cy="0"/>
+          <a:chOff x="0" y="0"/>
+          <a:chExt cx="0" cy="0"/>
+        </a:xfrm>
+      </p:grpSpPr>
+      <p:sp>
+        <p:nvSpPr>
+          <p:cNvPr id="2" name="Slide Image Placeholder 1"/>
+          <p:cNvSpPr>
+            <a:spLocks noGrp="1" noRot="1" noChangeAspect="1"/>
+          </p:cNvSpPr>
+          <p:nvPr>
+            <p:ph type="sldImg"/>
+          </p:nvPr>
+        </p:nvSpPr>
+        <p:spPr/>
+      </p:sp>
+      <p:sp>
+        <p:nvSpPr>
+          <p:cNvPr id="3" name="Notes Placeholder 2"/>
+          <p:cNvSpPr>
+            <a:spLocks noGrp="1"/>
+          </p:cNvSpPr>
+          <p:nvPr>
+            <p:ph type="body" idx="1"/>
+          </p:nvPr>
+        </p:nvSpPr>
+        <p:spPr/>
+        <p:txBody>
+          <a:bodyPr/>
+          <a:lstStyle/>
+          <a:p>
+            <a:r>
+              <a:rPr lang="en-US" dirty="0"/>
+              <a:t/>
+            </a:r>
+            <a:endParaRPr lang="en-US" dirty="0"/>
+          </a:p>
+        </p:txBody>
+      </p:sp>
+      <p:sp>
+        <p:nvSpPr>
+          <p:cNvPr id="4" name="Slide Number Placeholder 3"/>
+          <p:cNvSpPr>
+            <a:spLocks noGrp="1"/>
+          </p:cNvSpPr>
+          <p:nvPr>
+            <p:ph type="sldNum" sz="quarter" idx="10"/>
+          </p:nvPr>
+        </p:nvSpPr>
+        <p:spPr/>
+        <p:txBody>
+          <a:bodyPr/>
+          <a:lstStyle/>
+          <a:p>
+            <a:fld id="{F7021451-1387-4CA6-816F-3879F97B5CBC}" type="slidenum">
+              <a:rPr lang="en-US"/>
+              <a:t>191</a:t>
+            </a:fld>
+            <a:endParaRPr lang="en-US"/>
+          </a:p>
+        </p:txBody>
+      </p:sp>
+    </p:spTree>
+    <p:extLst>
+      <p:ext uri="{BB962C8B-B14F-4D97-AF65-F5344CB8AC3E}">
+        <p14:creationId xmlns:p14="http://schemas.microsoft.com/office/powerpoint/2010/main" val="1024086991"/>
+      </p:ext>
+    </p:extLst>
+  </p:cSld>
+  <p:clrMapOvr>
+    <a:masterClrMapping/>
+  </p:clrMapOvr>
+</p:notes>
+</file>
+
+<file path=ppt/notesSlides/notesSlide192.xml><?xml version="1.0" encoding="utf-8"?>
+<p:notes xmlns:a="http://schemas.openxmlformats.org/drawingml/2006/main" xmlns:r="http://schemas.openxmlformats.org/officeDocument/2006/relationships" xmlns:p="http://schemas.openxmlformats.org/presentationml/2006/main">
+  <p:cSld>
+    <p:spTree>
+      <p:nvGrpSpPr>
+        <p:cNvPr id="1" name=""/>
+        <p:cNvGrpSpPr/>
+        <p:nvPr/>
+      </p:nvGrpSpPr>
+      <p:grpSpPr>
+        <a:xfrm>
+          <a:off x="0" y="0"/>
+          <a:ext cx="0" cy="0"/>
+          <a:chOff x="0" y="0"/>
+          <a:chExt cx="0" cy="0"/>
+        </a:xfrm>
+      </p:grpSpPr>
+      <p:sp>
+        <p:nvSpPr>
+          <p:cNvPr id="2" name="Slide Image Placeholder 1"/>
+          <p:cNvSpPr>
+            <a:spLocks noGrp="1" noRot="1" noChangeAspect="1"/>
+          </p:cNvSpPr>
+          <p:nvPr>
+            <p:ph type="sldImg"/>
+          </p:nvPr>
+        </p:nvSpPr>
+        <p:spPr/>
+      </p:sp>
+      <p:sp>
+        <p:nvSpPr>
+          <p:cNvPr id="3" name="Notes Placeholder 2"/>
+          <p:cNvSpPr>
+            <a:spLocks noGrp="1"/>
+          </p:cNvSpPr>
+          <p:nvPr>
+            <p:ph type="body" idx="1"/>
+          </p:nvPr>
+        </p:nvSpPr>
+        <p:spPr/>
+        <p:txBody>
+          <a:bodyPr/>
+          <a:lstStyle/>
+          <a:p>
+            <a:r>
+              <a:rPr lang="en-US" dirty="0"/>
+              <a:t/>
+            </a:r>
+            <a:endParaRPr lang="en-US" dirty="0"/>
+          </a:p>
+        </p:txBody>
+      </p:sp>
+      <p:sp>
+        <p:nvSpPr>
+          <p:cNvPr id="4" name="Slide Number Placeholder 3"/>
+          <p:cNvSpPr>
+            <a:spLocks noGrp="1"/>
+          </p:cNvSpPr>
+          <p:nvPr>
+            <p:ph type="sldNum" sz="quarter" idx="10"/>
+          </p:nvPr>
+        </p:nvSpPr>
+        <p:spPr/>
+        <p:txBody>
+          <a:bodyPr/>
+          <a:lstStyle/>
+          <a:p>
+            <a:fld id="{F7021451-1387-4CA6-816F-3879F97B5CBC}" type="slidenum">
+              <a:rPr lang="en-US"/>
+              <a:t>192</a:t>
+            </a:fld>
+            <a:endParaRPr lang="en-US"/>
+          </a:p>
+        </p:txBody>
+      </p:sp>
+    </p:spTree>
+    <p:extLst>
+      <p:ext uri="{BB962C8B-B14F-4D97-AF65-F5344CB8AC3E}">
+        <p14:creationId xmlns:p14="http://schemas.microsoft.com/office/powerpoint/2010/main" val="1024086991"/>
+      </p:ext>
+    </p:extLst>
+  </p:cSld>
+  <p:clrMapOvr>
+    <a:masterClrMapping/>
+  </p:clrMapOvr>
+</p:notes>
+</file>
+
+<file path=ppt/notesSlides/notesSlide193.xml><?xml version="1.0" encoding="utf-8"?>
+<p:notes xmlns:a="http://schemas.openxmlformats.org/drawingml/2006/main" xmlns:r="http://schemas.openxmlformats.org/officeDocument/2006/relationships" xmlns:p="http://schemas.openxmlformats.org/presentationml/2006/main">
+  <p:cSld>
+    <p:spTree>
+      <p:nvGrpSpPr>
+        <p:cNvPr id="1" name=""/>
+        <p:cNvGrpSpPr/>
+        <p:nvPr/>
+      </p:nvGrpSpPr>
+      <p:grpSpPr>
+        <a:xfrm>
+          <a:off x="0" y="0"/>
+          <a:ext cx="0" cy="0"/>
+          <a:chOff x="0" y="0"/>
+          <a:chExt cx="0" cy="0"/>
+        </a:xfrm>
+      </p:grpSpPr>
+      <p:sp>
+        <p:nvSpPr>
+          <p:cNvPr id="2" name="Slide Image Placeholder 1"/>
+          <p:cNvSpPr>
+            <a:spLocks noGrp="1" noRot="1" noChangeAspect="1"/>
+          </p:cNvSpPr>
+          <p:nvPr>
+            <p:ph type="sldImg"/>
+          </p:nvPr>
+        </p:nvSpPr>
+        <p:spPr/>
+      </p:sp>
+      <p:sp>
+        <p:nvSpPr>
+          <p:cNvPr id="3" name="Notes Placeholder 2"/>
+          <p:cNvSpPr>
+            <a:spLocks noGrp="1"/>
+          </p:cNvSpPr>
+          <p:nvPr>
+            <p:ph type="body" idx="1"/>
+          </p:nvPr>
+        </p:nvSpPr>
+        <p:spPr/>
+        <p:txBody>
+          <a:bodyPr/>
+          <a:lstStyle/>
+          <a:p>
+            <a:r>
+              <a:rPr lang="en-US" dirty="0"/>
+              <a:t/>
+            </a:r>
+            <a:endParaRPr lang="en-US" dirty="0"/>
+          </a:p>
+        </p:txBody>
+      </p:sp>
+      <p:sp>
+        <p:nvSpPr>
+          <p:cNvPr id="4" name="Slide Number Placeholder 3"/>
+          <p:cNvSpPr>
+            <a:spLocks noGrp="1"/>
+          </p:cNvSpPr>
+          <p:nvPr>
+            <p:ph type="sldNum" sz="quarter" idx="10"/>
+          </p:nvPr>
+        </p:nvSpPr>
+        <p:spPr/>
+        <p:txBody>
+          <a:bodyPr/>
+          <a:lstStyle/>
+          <a:p>
+            <a:fld id="{F7021451-1387-4CA6-816F-3879F97B5CBC}" type="slidenum">
+              <a:rPr lang="en-US"/>
+              <a:t>193</a:t>
+            </a:fld>
+            <a:endParaRPr lang="en-US"/>
+          </a:p>
+        </p:txBody>
+      </p:sp>
+    </p:spTree>
+    <p:extLst>
+      <p:ext uri="{BB962C8B-B14F-4D97-AF65-F5344CB8AC3E}">
+        <p14:creationId xmlns:p14="http://schemas.microsoft.com/office/powerpoint/2010/main" val="1024086991"/>
+      </p:ext>
+    </p:extLst>
+  </p:cSld>
+  <p:clrMapOvr>
+    <a:masterClrMapping/>
+  </p:clrMapOvr>
+</p:notes>
+</file>
+
+<file path=ppt/notesSlides/notesSlide194.xml><?xml version="1.0" encoding="utf-8"?>
+<p:notes xmlns:a="http://schemas.openxmlformats.org/drawingml/2006/main" xmlns:r="http://schemas.openxmlformats.org/officeDocument/2006/relationships" xmlns:p="http://schemas.openxmlformats.org/presentationml/2006/main">
+  <p:cSld>
+    <p:spTree>
+      <p:nvGrpSpPr>
+        <p:cNvPr id="1" name=""/>
+        <p:cNvGrpSpPr/>
+        <p:nvPr/>
+      </p:nvGrpSpPr>
+      <p:grpSpPr>
+        <a:xfrm>
+          <a:off x="0" y="0"/>
+          <a:ext cx="0" cy="0"/>
+          <a:chOff x="0" y="0"/>
+          <a:chExt cx="0" cy="0"/>
+        </a:xfrm>
+      </p:grpSpPr>
+      <p:sp>
+        <p:nvSpPr>
+          <p:cNvPr id="2" name="Slide Image Placeholder 1"/>
+          <p:cNvSpPr>
+            <a:spLocks noGrp="1" noRot="1" noChangeAspect="1"/>
+          </p:cNvSpPr>
+          <p:nvPr>
+            <p:ph type="sldImg"/>
+          </p:nvPr>
+        </p:nvSpPr>
+        <p:spPr/>
+      </p:sp>
+      <p:sp>
+        <p:nvSpPr>
+          <p:cNvPr id="3" name="Notes Placeholder 2"/>
+          <p:cNvSpPr>
+            <a:spLocks noGrp="1"/>
+          </p:cNvSpPr>
+          <p:nvPr>
+            <p:ph type="body" idx="1"/>
+          </p:nvPr>
+        </p:nvSpPr>
+        <p:spPr/>
+        <p:txBody>
+          <a:bodyPr/>
+          <a:lstStyle/>
+          <a:p>
+            <a:r>
+              <a:rPr lang="en-US" dirty="0"/>
+              <a:t/>
+            </a:r>
+            <a:endParaRPr lang="en-US" dirty="0"/>
+          </a:p>
+        </p:txBody>
+      </p:sp>
+      <p:sp>
+        <p:nvSpPr>
+          <p:cNvPr id="4" name="Slide Number Placeholder 3"/>
+          <p:cNvSpPr>
+            <a:spLocks noGrp="1"/>
+          </p:cNvSpPr>
+          <p:nvPr>
+            <p:ph type="sldNum" sz="quarter" idx="10"/>
+          </p:nvPr>
+        </p:nvSpPr>
+        <p:spPr/>
+        <p:txBody>
+          <a:bodyPr/>
+          <a:lstStyle/>
+          <a:p>
+            <a:fld id="{F7021451-1387-4CA6-816F-3879F97B5CBC}" type="slidenum">
+              <a:rPr lang="en-US"/>
+              <a:t>194</a:t>
+            </a:fld>
+            <a:endParaRPr lang="en-US"/>
+          </a:p>
+        </p:txBody>
+      </p:sp>
+    </p:spTree>
+    <p:extLst>
+      <p:ext uri="{BB962C8B-B14F-4D97-AF65-F5344CB8AC3E}">
+        <p14:creationId xmlns:p14="http://schemas.microsoft.com/office/powerpoint/2010/main" val="1024086991"/>
+      </p:ext>
+    </p:extLst>
+  </p:cSld>
+  <p:clrMapOvr>
+    <a:masterClrMapping/>
+  </p:clrMapOvr>
+</p:notes>
+</file>
+
+<file path=ppt/notesSlides/notesSlide195.xml><?xml version="1.0" encoding="utf-8"?>
+<p:notes xmlns:a="http://schemas.openxmlformats.org/drawingml/2006/main" xmlns:r="http://schemas.openxmlformats.org/officeDocument/2006/relationships" xmlns:p="http://schemas.openxmlformats.org/presentationml/2006/main">
+  <p:cSld>
+    <p:spTree>
+      <p:nvGrpSpPr>
+        <p:cNvPr id="1" name=""/>
+        <p:cNvGrpSpPr/>
+        <p:nvPr/>
+      </p:nvGrpSpPr>
+      <p:grpSpPr>
+        <a:xfrm>
+          <a:off x="0" y="0"/>
+          <a:ext cx="0" cy="0"/>
+          <a:chOff x="0" y="0"/>
+          <a:chExt cx="0" cy="0"/>
+        </a:xfrm>
+      </p:grpSpPr>
+      <p:sp>
+        <p:nvSpPr>
+          <p:cNvPr id="2" name="Slide Image Placeholder 1"/>
+          <p:cNvSpPr>
+            <a:spLocks noGrp="1" noRot="1" noChangeAspect="1"/>
+          </p:cNvSpPr>
+          <p:nvPr>
+            <p:ph type="sldImg"/>
+          </p:nvPr>
+        </p:nvSpPr>
+        <p:spPr/>
+      </p:sp>
+      <p:sp>
+        <p:nvSpPr>
+          <p:cNvPr id="3" name="Notes Placeholder 2"/>
+          <p:cNvSpPr>
+            <a:spLocks noGrp="1"/>
+          </p:cNvSpPr>
+          <p:nvPr>
+            <p:ph type="body" idx="1"/>
+          </p:nvPr>
+        </p:nvSpPr>
+        <p:spPr/>
+        <p:txBody>
+          <a:bodyPr/>
+          <a:lstStyle/>
+          <a:p>
+            <a:r>
+              <a:rPr lang="en-US" dirty="0"/>
+              <a:t/>
+            </a:r>
+            <a:endParaRPr lang="en-US" dirty="0"/>
+          </a:p>
+        </p:txBody>
+      </p:sp>
+      <p:sp>
+        <p:nvSpPr>
+          <p:cNvPr id="4" name="Slide Number Placeholder 3"/>
+          <p:cNvSpPr>
+            <a:spLocks noGrp="1"/>
+          </p:cNvSpPr>
+          <p:nvPr>
+            <p:ph type="sldNum" sz="quarter" idx="10"/>
+          </p:nvPr>
+        </p:nvSpPr>
+        <p:spPr/>
+        <p:txBody>
+          <a:bodyPr/>
+          <a:lstStyle/>
+          <a:p>
+            <a:fld id="{F7021451-1387-4CA6-816F-3879F97B5CBC}" type="slidenum">
+              <a:rPr lang="en-US"/>
+              <a:t>195</a:t>
+            </a:fld>
+            <a:endParaRPr lang="en-US"/>
+          </a:p>
+        </p:txBody>
+      </p:sp>
+    </p:spTree>
+    <p:extLst>
+      <p:ext uri="{BB962C8B-B14F-4D97-AF65-F5344CB8AC3E}">
+        <p14:creationId xmlns:p14="http://schemas.microsoft.com/office/powerpoint/2010/main" val="1024086991"/>
+      </p:ext>
+    </p:extLst>
+  </p:cSld>
+  <p:clrMapOvr>
+    <a:masterClrMapping/>
+  </p:clrMapOvr>
+</p:notes>
+</file>
+
+<file path=ppt/notesSlides/notesSlide196.xml><?xml version="1.0" encoding="utf-8"?>
+<p:notes xmlns:a="http://schemas.openxmlformats.org/drawingml/2006/main" xmlns:r="http://schemas.openxmlformats.org/officeDocument/2006/relationships" xmlns:p="http://schemas.openxmlformats.org/presentationml/2006/main">
+  <p:cSld>
+    <p:spTree>
+      <p:nvGrpSpPr>
+        <p:cNvPr id="1" name=""/>
+        <p:cNvGrpSpPr/>
+        <p:nvPr/>
+      </p:nvGrpSpPr>
+      <p:grpSpPr>
+        <a:xfrm>
+          <a:off x="0" y="0"/>
+          <a:ext cx="0" cy="0"/>
+          <a:chOff x="0" y="0"/>
+          <a:chExt cx="0" cy="0"/>
+        </a:xfrm>
+      </p:grpSpPr>
+      <p:sp>
+        <p:nvSpPr>
+          <p:cNvPr id="2" name="Slide Image Placeholder 1"/>
+          <p:cNvSpPr>
+            <a:spLocks noGrp="1" noRot="1" noChangeAspect="1"/>
+          </p:cNvSpPr>
+          <p:nvPr>
+            <p:ph type="sldImg"/>
+          </p:nvPr>
+        </p:nvSpPr>
+        <p:spPr/>
+      </p:sp>
+      <p:sp>
+        <p:nvSpPr>
+          <p:cNvPr id="3" name="Notes Placeholder 2"/>
+          <p:cNvSpPr>
+            <a:spLocks noGrp="1"/>
+          </p:cNvSpPr>
+          <p:nvPr>
+            <p:ph type="body" idx="1"/>
+          </p:nvPr>
+        </p:nvSpPr>
+        <p:spPr/>
+        <p:txBody>
+          <a:bodyPr/>
+          <a:lstStyle/>
+          <a:p>
+            <a:r>
+              <a:rPr lang="en-US" dirty="0"/>
+              <a:t/>
+            </a:r>
+            <a:endParaRPr lang="en-US" dirty="0"/>
+          </a:p>
+        </p:txBody>
+      </p:sp>
+      <p:sp>
+        <p:nvSpPr>
+          <p:cNvPr id="4" name="Slide Number Placeholder 3"/>
+          <p:cNvSpPr>
+            <a:spLocks noGrp="1"/>
+          </p:cNvSpPr>
+          <p:nvPr>
+            <p:ph type="sldNum" sz="quarter" idx="10"/>
+          </p:nvPr>
+        </p:nvSpPr>
+        <p:spPr/>
+        <p:txBody>
+          <a:bodyPr/>
+          <a:lstStyle/>
+          <a:p>
+            <a:fld id="{F7021451-1387-4CA6-816F-3879F97B5CBC}" type="slidenum">
+              <a:rPr lang="en-US"/>
+              <a:t>196</a:t>
+            </a:fld>
+            <a:endParaRPr lang="en-US"/>
+          </a:p>
+        </p:txBody>
+      </p:sp>
+    </p:spTree>
+    <p:extLst>
+      <p:ext uri="{BB962C8B-B14F-4D97-AF65-F5344CB8AC3E}">
+        <p14:creationId xmlns:p14="http://schemas.microsoft.com/office/powerpoint/2010/main" val="1024086991"/>
+      </p:ext>
+    </p:extLst>
+  </p:cSld>
+  <p:clrMapOvr>
+    <a:masterClrMapping/>
+  </p:clrMapOvr>
+</p:notes>
+</file>
+
+<file path=ppt/notesSlides/notesSlide197.xml><?xml version="1.0" encoding="utf-8"?>
+<p:notes xmlns:a="http://schemas.openxmlformats.org/drawingml/2006/main" xmlns:r="http://schemas.openxmlformats.org/officeDocument/2006/relationships" xmlns:p="http://schemas.openxmlformats.org/presentationml/2006/main">
+  <p:cSld>
+    <p:spTree>
+      <p:nvGrpSpPr>
+        <p:cNvPr id="1" name=""/>
+        <p:cNvGrpSpPr/>
+        <p:nvPr/>
+      </p:nvGrpSpPr>
+      <p:grpSpPr>
+        <a:xfrm>
+          <a:off x="0" y="0"/>
+          <a:ext cx="0" cy="0"/>
+          <a:chOff x="0" y="0"/>
+          <a:chExt cx="0" cy="0"/>
+        </a:xfrm>
+      </p:grpSpPr>
+      <p:sp>
+        <p:nvSpPr>
+          <p:cNvPr id="2" name="Slide Image Placeholder 1"/>
+          <p:cNvSpPr>
+            <a:spLocks noGrp="1" noRot="1" noChangeAspect="1"/>
+          </p:cNvSpPr>
+          <p:nvPr>
+            <p:ph type="sldImg"/>
+          </p:nvPr>
+        </p:nvSpPr>
+        <p:spPr/>
+      </p:sp>
+      <p:sp>
+        <p:nvSpPr>
+          <p:cNvPr id="3" name="Notes Placeholder 2"/>
+          <p:cNvSpPr>
+            <a:spLocks noGrp="1"/>
+          </p:cNvSpPr>
+          <p:nvPr>
+            <p:ph type="body" idx="1"/>
+          </p:nvPr>
+        </p:nvSpPr>
+        <p:spPr/>
+        <p:txBody>
+          <a:bodyPr/>
+          <a:lstStyle/>
+          <a:p>
+            <a:r>
+              <a:rPr lang="en-US" dirty="0"/>
+              <a:t/>
+            </a:r>
+            <a:endParaRPr lang="en-US" dirty="0"/>
+          </a:p>
+        </p:txBody>
+      </p:sp>
+      <p:sp>
+        <p:nvSpPr>
+          <p:cNvPr id="4" name="Slide Number Placeholder 3"/>
+          <p:cNvSpPr>
+            <a:spLocks noGrp="1"/>
+          </p:cNvSpPr>
+          <p:nvPr>
+            <p:ph type="sldNum" sz="quarter" idx="10"/>
+          </p:nvPr>
+        </p:nvSpPr>
+        <p:spPr/>
+        <p:txBody>
+          <a:bodyPr/>
+          <a:lstStyle/>
+          <a:p>
+            <a:fld id="{F7021451-1387-4CA6-816F-3879F97B5CBC}" type="slidenum">
+              <a:rPr lang="en-US"/>
+              <a:t>197</a:t>
+            </a:fld>
+            <a:endParaRPr lang="en-US"/>
+          </a:p>
+        </p:txBody>
+      </p:sp>
+    </p:spTree>
+    <p:extLst>
+      <p:ext uri="{BB962C8B-B14F-4D97-AF65-F5344CB8AC3E}">
+        <p14:creationId xmlns:p14="http://schemas.microsoft.com/office/powerpoint/2010/main" val="1024086991"/>
+      </p:ext>
+    </p:extLst>
+  </p:cSld>
+  <p:clrMapOvr>
+    <a:masterClrMapping/>
+  </p:clrMapOvr>
+</p:notes>
+</file>
+
+<file path=ppt/notesSlides/notesSlide198.xml><?xml version="1.0" encoding="utf-8"?>
+<p:notes xmlns:a="http://schemas.openxmlformats.org/drawingml/2006/main" xmlns:r="http://schemas.openxmlformats.org/officeDocument/2006/relationships" xmlns:p="http://schemas.openxmlformats.org/presentationml/2006/main">
+  <p:cSld>
+    <p:spTree>
+      <p:nvGrpSpPr>
+        <p:cNvPr id="1" name=""/>
+        <p:cNvGrpSpPr/>
+        <p:nvPr/>
+      </p:nvGrpSpPr>
+      <p:grpSpPr>
+        <a:xfrm>
+          <a:off x="0" y="0"/>
+          <a:ext cx="0" cy="0"/>
+          <a:chOff x="0" y="0"/>
+          <a:chExt cx="0" cy="0"/>
+        </a:xfrm>
+      </p:grpSpPr>
+      <p:sp>
+        <p:nvSpPr>
+          <p:cNvPr id="2" name="Slide Image Placeholder 1"/>
+          <p:cNvSpPr>
+            <a:spLocks noGrp="1" noRot="1" noChangeAspect="1"/>
+          </p:cNvSpPr>
+          <p:nvPr>
+            <p:ph type="sldImg"/>
+          </p:nvPr>
+        </p:nvSpPr>
+        <p:spPr/>
+      </p:sp>
+      <p:sp>
+        <p:nvSpPr>
+          <p:cNvPr id="3" name="Notes Placeholder 2"/>
+          <p:cNvSpPr>
+            <a:spLocks noGrp="1"/>
+          </p:cNvSpPr>
+          <p:nvPr>
+            <p:ph type="body" idx="1"/>
+          </p:nvPr>
+        </p:nvSpPr>
+        <p:spPr/>
+        <p:txBody>
+          <a:bodyPr/>
+          <a:lstStyle/>
+          <a:p>
+            <a:r>
+              <a:rPr lang="en-US" dirty="0"/>
+              <a:t/>
+            </a:r>
+            <a:endParaRPr lang="en-US" dirty="0"/>
+          </a:p>
+        </p:txBody>
+      </p:sp>
+      <p:sp>
+        <p:nvSpPr>
+          <p:cNvPr id="4" name="Slide Number Placeholder 3"/>
+          <p:cNvSpPr>
+            <a:spLocks noGrp="1"/>
+          </p:cNvSpPr>
+          <p:nvPr>
+            <p:ph type="sldNum" sz="quarter" idx="10"/>
+          </p:nvPr>
+        </p:nvSpPr>
+        <p:spPr/>
+        <p:txBody>
+          <a:bodyPr/>
+          <a:lstStyle/>
+          <a:p>
+            <a:fld id="{F7021451-1387-4CA6-816F-3879F97B5CBC}" type="slidenum">
+              <a:rPr lang="en-US"/>
+              <a:t>198</a:t>
+            </a:fld>
+            <a:endParaRPr lang="en-US"/>
+          </a:p>
+        </p:txBody>
+      </p:sp>
+    </p:spTree>
+    <p:extLst>
+      <p:ext uri="{BB962C8B-B14F-4D97-AF65-F5344CB8AC3E}">
+        <p14:creationId xmlns:p14="http://schemas.microsoft.com/office/powerpoint/2010/main" val="1024086991"/>
+      </p:ext>
+    </p:extLst>
+  </p:cSld>
+  <p:clrMapOvr>
+    <a:masterClrMapping/>
+  </p:clrMapOvr>
+</p:notes>
+</file>
+
+<file path=ppt/notesSlides/notesSlide199.xml><?xml version="1.0" encoding="utf-8"?>
+<p:notes xmlns:a="http://schemas.openxmlformats.org/drawingml/2006/main" xmlns:r="http://schemas.openxmlformats.org/officeDocument/2006/relationships" xmlns:p="http://schemas.openxmlformats.org/presentationml/2006/main">
+  <p:cSld>
+    <p:spTree>
+      <p:nvGrpSpPr>
+        <p:cNvPr id="1" name=""/>
+        <p:cNvGrpSpPr/>
+        <p:nvPr/>
+      </p:nvGrpSpPr>
+      <p:grpSpPr>
+        <a:xfrm>
+          <a:off x="0" y="0"/>
+          <a:ext cx="0" cy="0"/>
+          <a:chOff x="0" y="0"/>
+          <a:chExt cx="0" cy="0"/>
+        </a:xfrm>
+      </p:grpSpPr>
+      <p:sp>
+        <p:nvSpPr>
+          <p:cNvPr id="2" name="Slide Image Placeholder 1"/>
+          <p:cNvSpPr>
+            <a:spLocks noGrp="1" noRot="1" noChangeAspect="1"/>
+          </p:cNvSpPr>
+          <p:nvPr>
+            <p:ph type="sldImg"/>
+          </p:nvPr>
+        </p:nvSpPr>
+        <p:spPr/>
+      </p:sp>
+      <p:sp>
+        <p:nvSpPr>
+          <p:cNvPr id="3" name="Notes Placeholder 2"/>
+          <p:cNvSpPr>
+            <a:spLocks noGrp="1"/>
+          </p:cNvSpPr>
+          <p:nvPr>
+            <p:ph type="body" idx="1"/>
+          </p:nvPr>
+        </p:nvSpPr>
+        <p:spPr/>
+        <p:txBody>
+          <a:bodyPr/>
+          <a:lstStyle/>
+          <a:p>
+            <a:r>
+              <a:rPr lang="en-US" dirty="0"/>
+              <a:t/>
+            </a:r>
+            <a:endParaRPr lang="en-US" dirty="0"/>
+          </a:p>
+        </p:txBody>
+      </p:sp>
+      <p:sp>
+        <p:nvSpPr>
+          <p:cNvPr id="4" name="Slide Number Placeholder 3"/>
+          <p:cNvSpPr>
+            <a:spLocks noGrp="1"/>
+          </p:cNvSpPr>
+          <p:nvPr>
+            <p:ph type="sldNum" sz="quarter" idx="10"/>
+          </p:nvPr>
+        </p:nvSpPr>
+        <p:spPr/>
+        <p:txBody>
+          <a:bodyPr/>
+          <a:lstStyle/>
+          <a:p>
+            <a:fld id="{F7021451-1387-4CA6-816F-3879F97B5CBC}" type="slidenum">
+              <a:rPr lang="en-US"/>
+              <a:t>199</a:t>
+            </a:fld>
+            <a:endParaRPr lang="en-US"/>
+          </a:p>
+        </p:txBody>
+      </p:sp>
+    </p:spTree>
+    <p:extLst>
+      <p:ext uri="{BB962C8B-B14F-4D97-AF65-F5344CB8AC3E}">
+        <p14:creationId xmlns:p14="http://schemas.microsoft.com/office/powerpoint/2010/main" val="1024086991"/>
+      </p:ext>
+    </p:extLst>
+  </p:cSld>
+  <p:clrMapOvr>
+    <a:masterClrMapping/>
+  </p:clrMapOvr>
+</p:notes>
+</file>
+
 <file path=ppt/notesSlides/notesSlide2.xml><?xml version="1.0" encoding="utf-8"?>
 <p:notes xmlns:a="http://schemas.openxmlformats.org/drawingml/2006/main" xmlns:r="http://schemas.openxmlformats.org/officeDocument/2006/relationships" xmlns:p="http://schemas.openxmlformats.org/presentationml/2006/main">
   <p:cSld>
@@ -8711,6 +10581,94 @@
             <a:fld id="{F7021451-1387-4CA6-816F-3879F97B5CBC}" type="slidenum">
               <a:rPr lang="en-US"/>
               <a:t>20</a:t>
+            </a:fld>
+            <a:endParaRPr lang="en-US"/>
+          </a:p>
+        </p:txBody>
+      </p:sp>
+    </p:spTree>
+    <p:extLst>
+      <p:ext uri="{BB962C8B-B14F-4D97-AF65-F5344CB8AC3E}">
+        <p14:creationId xmlns:p14="http://schemas.microsoft.com/office/powerpoint/2010/main" val="1024086991"/>
+      </p:ext>
+    </p:extLst>
+  </p:cSld>
+  <p:clrMapOvr>
+    <a:masterClrMapping/>
+  </p:clrMapOvr>
+</p:notes>
+</file>
+
+<file path=ppt/notesSlides/notesSlide200.xml><?xml version="1.0" encoding="utf-8"?>
+<p:notes xmlns:a="http://schemas.openxmlformats.org/drawingml/2006/main" xmlns:r="http://schemas.openxmlformats.org/officeDocument/2006/relationships" xmlns:p="http://schemas.openxmlformats.org/presentationml/2006/main">
+  <p:cSld>
+    <p:spTree>
+      <p:nvGrpSpPr>
+        <p:cNvPr id="1" name=""/>
+        <p:cNvGrpSpPr/>
+        <p:nvPr/>
+      </p:nvGrpSpPr>
+      <p:grpSpPr>
+        <a:xfrm>
+          <a:off x="0" y="0"/>
+          <a:ext cx="0" cy="0"/>
+          <a:chOff x="0" y="0"/>
+          <a:chExt cx="0" cy="0"/>
+        </a:xfrm>
+      </p:grpSpPr>
+      <p:sp>
+        <p:nvSpPr>
+          <p:cNvPr id="2" name="Slide Image Placeholder 1"/>
+          <p:cNvSpPr>
+            <a:spLocks noGrp="1" noRot="1" noChangeAspect="1"/>
+          </p:cNvSpPr>
+          <p:nvPr>
+            <p:ph type="sldImg"/>
+          </p:nvPr>
+        </p:nvSpPr>
+        <p:spPr/>
+      </p:sp>
+      <p:sp>
+        <p:nvSpPr>
+          <p:cNvPr id="3" name="Notes Placeholder 2"/>
+          <p:cNvSpPr>
+            <a:spLocks noGrp="1"/>
+          </p:cNvSpPr>
+          <p:nvPr>
+            <p:ph type="body" idx="1"/>
+          </p:nvPr>
+        </p:nvSpPr>
+        <p:spPr/>
+        <p:txBody>
+          <a:bodyPr/>
+          <a:lstStyle/>
+          <a:p>
+            <a:r>
+              <a:rPr lang="en-US" dirty="0"/>
+              <a:t/>
+            </a:r>
+            <a:endParaRPr lang="en-US" dirty="0"/>
+          </a:p>
+        </p:txBody>
+      </p:sp>
+      <p:sp>
+        <p:nvSpPr>
+          <p:cNvPr id="4" name="Slide Number Placeholder 3"/>
+          <p:cNvSpPr>
+            <a:spLocks noGrp="1"/>
+          </p:cNvSpPr>
+          <p:nvPr>
+            <p:ph type="sldNum" sz="quarter" idx="10"/>
+          </p:nvPr>
+        </p:nvSpPr>
+        <p:spPr/>
+        <p:txBody>
+          <a:bodyPr/>
+          <a:lstStyle/>
+          <a:p>
+            <a:fld id="{F7021451-1387-4CA6-816F-3879F97B5CBC}" type="slidenum">
+              <a:rPr lang="en-US"/>
+              <a:t>200</a:t>
             </a:fld>
             <a:endParaRPr lang="en-US"/>
           </a:p>
@@ -16906,7 +18864,7 @@
                   <a:srgbClr val="FFFFFF"/>
                 </a:solidFill>
               </a:rPr>
-              <a:t>Publié le 24 juin 2026 (validé 12 mai 2026).</a:t>
+              <a:t>Validé le 12 mai 2026 (publié le 24 juin 2026).</a:t>
             </a:r>
             <a:endParaRPr lang="en-US" sz="1600" dirty="0"/>
           </a:p>
@@ -17010,7 +18968,7 @@
                   <a:srgbClr val="FFFFFF"/>
                 </a:solidFill>
               </a:rPr>
-              <a:t>AIPD pour traitements à risque élevé (données sensibles).</a:t>
+              <a:t>AIPD pour traitements à risque élevé.</a:t>
             </a:r>
             <a:endParaRPr lang="en-US" sz="1600" dirty="0"/>
           </a:p>
@@ -17642,7 +19600,7 @@
                   <a:srgbClr val="FFFFFF"/>
                 </a:solidFill>
               </a:rPr>
-              <a:t>Accès limité aux informations nécessaires à la mission.</a:t>
+              <a:t>Accès limité aux informations nécessaires.</a:t>
             </a:r>
             <a:endParaRPr lang="en-US" sz="1600" dirty="0"/>
           </a:p>
@@ -18098,7 +20056,7 @@
                   <a:srgbClr val="FFFFFF"/>
                 </a:solidFill>
               </a:rPr>
-              <a:t>B. Un cadre (équipe de soin/accompagnement) et le consentement</a:t>
+              <a:t>B. Un cadre (équipe de soins/accompagnement) et le consentement</a:t>
             </a:r>
             <a:endParaRPr lang="en-US" sz="1600" dirty="0"/>
           </a:p>
@@ -19118,7 +21076,7 @@
                   <a:srgbClr val="FFFFFF"/>
                 </a:solidFill>
               </a:rPr>
-              <a:t>Respect des choix et de la parole de la personne.</a:t>
+              <a:t>Respect des choix et de la parole.</a:t>
             </a:r>
             <a:endParaRPr lang="en-US" sz="1600" dirty="0"/>
           </a:p>
@@ -19750,7 +21708,7 @@
                   <a:srgbClr val="FFFFFF"/>
                 </a:solidFill>
               </a:rPr>
-              <a:t>Accompagner les équipes (sens, formation, soutien).</a:t>
+              <a:t>Accompagner les équipes.</a:t>
             </a:r>
             <a:endParaRPr lang="en-US" sz="1600" dirty="0"/>
           </a:p>
@@ -20066,7 +22024,7 @@
                   <a:srgbClr val="FFFFFF"/>
                 </a:solidFill>
               </a:rPr>
-              <a:t>Écrire des faits, sans jugements stigmatisants.</a:t>
+              <a:t>Des faits, sans jugements stigmatisants.</a:t>
             </a:r>
             <a:endParaRPr lang="en-US" sz="1600" dirty="0"/>
           </a:p>
@@ -21926,7 +23884,7 @@
                   <a:srgbClr val="FFFFFF"/>
                 </a:solidFill>
               </a:rPr>
-              <a:t>C. Seulement une note de service</a:t>
+              <a:t>C. Une note de service seule</a:t>
             </a:r>
             <a:endParaRPr lang="en-US" sz="1600" dirty="0"/>
           </a:p>
@@ -25226,7 +27184,7 @@
                   <a:srgbClr val="FFFFFF"/>
                 </a:solidFill>
               </a:rPr>
-              <a:t>Comparabilité et échange entre acteurs.</a:t>
+              <a:t>Comparabilité et échange.</a:t>
             </a:r>
             <a:endParaRPr lang="en-US" sz="1600" dirty="0"/>
           </a:p>
@@ -26070,7 +28028,7 @@
                   <a:srgbClr val="FFFFFF"/>
                 </a:solidFill>
               </a:rPr>
-              <a:t>Co-construction + suivi + traçabilité = atout évaluation.</a:t>
+              <a:t>Co-construction + suivi + traçabilité.</a:t>
             </a:r>
             <a:endParaRPr lang="en-US" sz="1600" dirty="0"/>
           </a:p>
@@ -26386,7 +28344,7 @@
                   <a:srgbClr val="FFFFFF"/>
                 </a:solidFill>
               </a:rPr>
-              <a:t>Au parcours de la personne (continuité).</a:t>
+              <a:t>Au parcours de la personne.</a:t>
             </a:r>
             <a:endParaRPr lang="en-US" sz="1600" dirty="0"/>
           </a:p>
@@ -26702,7 +28660,7 @@
                   <a:srgbClr val="FFFFFF"/>
                 </a:solidFill>
               </a:rPr>
-              <a:t>Concilier qualité d'accompagnement, droits et coordination.</a:t>
+              <a:t>Concilier qualité, droits et coordination.</a:t>
             </a:r>
             <a:endParaRPr lang="en-US" sz="1600" dirty="0"/>
           </a:p>
@@ -27086,7 +29044,7 @@
                   <a:srgbClr val="FFFFFF"/>
                 </a:solidFill>
               </a:rPr>
-              <a:t>Q80. Vrai ou faux : le DUI remplace la relation d'accompagnement.</a:t>
+              <a:t>Q80. Vrai/faux : le DUI remplace la relation d'accompagnement.</a:t>
             </a:r>
             <a:endParaRPr lang="en-US" sz="2000" dirty="0"/>
           </a:p>
@@ -28070,7 +30028,7 @@
                   <a:srgbClr val="FFFFFF"/>
                 </a:solidFill>
               </a:rPr>
-              <a:t>Contraire à la minimisation et au besoin d'en connaître.</a:t>
+              <a:t>Contraire à la minimisation.</a:t>
             </a:r>
             <a:endParaRPr lang="en-US" sz="1600" dirty="0"/>
           </a:p>
@@ -28386,7 +30344,7 @@
                   <a:srgbClr val="FFFFFF"/>
                 </a:solidFill>
               </a:rPr>
-              <a:t>La fiabilité conditionne la sécurité de l'accompagnement.</a:t>
+              <a:t>La fiabilité conditionne la sécurité.</a:t>
             </a:r>
             <a:endParaRPr lang="en-US" sz="1600" dirty="0"/>
           </a:p>
@@ -29230,7 +31188,7 @@
                   <a:srgbClr val="FFFFFF"/>
                 </a:solidFill>
               </a:rPr>
-              <a:t>Risque majeur : standardisation au détriment du projet réel.</a:t>
+              <a:t>Risque majeur de standardisation.</a:t>
             </a:r>
             <a:endParaRPr lang="en-US" sz="1600" dirty="0"/>
           </a:p>
@@ -29546,7 +31504,7 @@
                   <a:srgbClr val="FFFFFF"/>
                 </a:solidFill>
               </a:rPr>
-              <a:t>Sans critère, pas de suivi possible.</a:t>
+              <a:t>Sans critère, pas de suivi.</a:t>
             </a:r>
             <a:endParaRPr lang="en-US" sz="1600" dirty="0"/>
           </a:p>
@@ -29862,7 +31820,7 @@
                   <a:srgbClr val="FFFFFF"/>
                 </a:solidFill>
               </a:rPr>
-              <a:t>Durées proportionnées exigées (RGPD).</a:t>
+              <a:t>Durées proportionnées exigées.</a:t>
             </a:r>
             <a:endParaRPr lang="en-US" sz="1600" dirty="0"/>
           </a:p>
@@ -30178,7 +32136,7 @@
                   <a:srgbClr val="FFFFFF"/>
                 </a:solidFill>
               </a:rPr>
-              <a:t>Il faut former à la démarche ET à l'outil.</a:t>
+              <a:t>Former à la démarche ET à l'outil.</a:t>
             </a:r>
             <a:endParaRPr lang="en-US" sz="1600" dirty="0"/>
           </a:p>
@@ -30494,7 +32452,219 @@
                   <a:srgbClr val="FFFFFF"/>
                 </a:solidFill>
               </a:rPr>
-              <a:t>Participation réelle + objectifs atteints/réajustés.</a:t>
+              <a:t>Participation réelle + objectifs atteints.</a:t>
+            </a:r>
+            <a:endParaRPr lang="en-US" sz="1600" dirty="0"/>
+          </a:p>
+        </p:txBody>
+      </p:sp>
+    </p:spTree>
+  </p:cSld>
+  <p:clrMapOvr>
+    <a:masterClrMapping/>
+  </p:clrMapOvr>
+</p:sld>
+</file>
+
+<file path=ppt/slides/slide179.xml><?xml version="1.0" encoding="utf-8"?>
+<p:sld xmlns:a="http://schemas.openxmlformats.org/drawingml/2006/main" xmlns:r="http://schemas.openxmlformats.org/officeDocument/2006/relationships" xmlns:p="http://schemas.openxmlformats.org/presentationml/2006/main">
+  <p:cSld name="Slide 179">
+    <p:bg>
+      <p:bgPr>
+        <a:solidFill>
+          <a:srgbClr val="1B3A6B"/>
+        </a:solidFill>
+      </p:bgPr>
+    </p:bg>
+    <p:spTree>
+      <p:nvGrpSpPr>
+        <p:cNvPr id="1" name=""/>
+        <p:cNvGrpSpPr/>
+        <p:nvPr/>
+      </p:nvGrpSpPr>
+      <p:grpSpPr>
+        <a:xfrm>
+          <a:off x="0" y="0"/>
+          <a:ext cx="0" cy="0"/>
+          <a:chOff x="0" y="0"/>
+          <a:chExt cx="0" cy="0"/>
+        </a:xfrm>
+      </p:grpSpPr>
+      <p:sp>
+        <p:nvSpPr>
+          <p:cNvPr id="2" name="Text 0"/>
+          <p:cNvSpPr/>
+          <p:nvPr/>
+        </p:nvSpPr>
+        <p:spPr>
+          <a:xfrm>
+            <a:off x="457200" y="365760"/>
+            <a:ext cx="11216640" cy="1280160"/>
+          </a:xfrm>
+          <a:prstGeom prst="rect">
+            <a:avLst/>
+          </a:prstGeom>
+          <a:noFill/>
+          <a:ln/>
+        </p:spPr>
+        <p:txBody>
+          <a:bodyPr wrap="square" rtlCol="0" anchor="ctr"/>
+          <a:lstStyle/>
+          <a:p>
+            <a:pPr indent="0" marL="0">
+              <a:buNone/>
+            </a:pPr>
+            <a:r>
+              <a:rPr lang="en-US" sz="2000" b="1" dirty="0">
+                <a:solidFill>
+                  <a:srgbClr val="FFFFFF"/>
+                </a:solidFill>
+              </a:rPr>
+              <a:t>Q90. Le guide a été adopté par quelle instance HAS ?</a:t>
+            </a:r>
+            <a:endParaRPr lang="en-US" sz="2000" dirty="0"/>
+          </a:p>
+        </p:txBody>
+      </p:sp>
+      <p:sp>
+        <p:nvSpPr>
+          <p:cNvPr id="3" name="Text 1"/>
+          <p:cNvSpPr/>
+          <p:nvPr/>
+        </p:nvSpPr>
+        <p:spPr>
+          <a:xfrm>
+            <a:off x="640080" y="1920240"/>
+            <a:ext cx="10728960" cy="0"/>
+          </a:xfrm>
+          <a:prstGeom prst="rect">
+            <a:avLst/>
+          </a:prstGeom>
+          <a:noFill/>
+          <a:ln/>
+        </p:spPr>
+        <p:txBody>
+          <a:bodyPr wrap="square" rtlCol="0" anchor="ctr"/>
+          <a:lstStyle/>
+          <a:p>
+            <a:pPr indent="0" marL="0">
+              <a:buNone/>
+            </a:pPr>
+            <a:r>
+              <a:rPr lang="en-US" sz="1600" dirty="0">
+                <a:solidFill>
+                  <a:srgbClr val="FFFFFF"/>
+                </a:solidFill>
+              </a:rPr>
+              <a:t>A. La CSMS (Commission sociale et médico-sociale), le 12 mai 2026</a:t>
+            </a:r>
+            <a:endParaRPr lang="en-US" sz="1600" dirty="0"/>
+          </a:p>
+        </p:txBody>
+      </p:sp>
+      <p:sp>
+        <p:nvSpPr>
+          <p:cNvPr id="4" name="Text 2"/>
+          <p:cNvSpPr/>
+          <p:nvPr/>
+        </p:nvSpPr>
+        <p:spPr>
+          <a:xfrm>
+            <a:off x="640080" y="2788920"/>
+            <a:ext cx="10728960" cy="0"/>
+          </a:xfrm>
+          <a:prstGeom prst="rect">
+            <a:avLst/>
+          </a:prstGeom>
+          <a:noFill/>
+          <a:ln/>
+        </p:spPr>
+        <p:txBody>
+          <a:bodyPr wrap="square" rtlCol="0" anchor="ctr"/>
+          <a:lstStyle/>
+          <a:p>
+            <a:pPr indent="0" marL="0">
+              <a:buNone/>
+            </a:pPr>
+            <a:r>
+              <a:rPr lang="en-US" sz="1600" dirty="0">
+                <a:solidFill>
+                  <a:srgbClr val="FFFFFF"/>
+                </a:solidFill>
+              </a:rPr>
+              <a:t>B. Le collège, en 2024</a:t>
+            </a:r>
+            <a:endParaRPr lang="en-US" sz="1600" dirty="0"/>
+          </a:p>
+        </p:txBody>
+      </p:sp>
+      <p:sp>
+        <p:nvSpPr>
+          <p:cNvPr id="5" name="Text 3"/>
+          <p:cNvSpPr/>
+          <p:nvPr/>
+        </p:nvSpPr>
+        <p:spPr>
+          <a:xfrm>
+            <a:off x="640080" y="3657600"/>
+            <a:ext cx="10728960" cy="0"/>
+          </a:xfrm>
+          <a:prstGeom prst="rect">
+            <a:avLst/>
+          </a:prstGeom>
+          <a:noFill/>
+          <a:ln/>
+        </p:spPr>
+        <p:txBody>
+          <a:bodyPr wrap="square" rtlCol="0" anchor="ctr"/>
+          <a:lstStyle/>
+          <a:p>
+            <a:pPr indent="0" marL="0">
+              <a:buNone/>
+            </a:pPr>
+            <a:r>
+              <a:rPr lang="en-US" sz="1600" dirty="0">
+                <a:solidFill>
+                  <a:srgbClr val="FFFFFF"/>
+                </a:solidFill>
+              </a:rPr>
+              <a:t>C. L'ANESM</a:t>
+            </a:r>
+            <a:endParaRPr lang="en-US" sz="1600" dirty="0"/>
+          </a:p>
+        </p:txBody>
+      </p:sp>
+      <p:sp>
+        <p:nvSpPr>
+          <p:cNvPr id="6" name="Text 4"/>
+          <p:cNvSpPr/>
+          <p:nvPr/>
+        </p:nvSpPr>
+        <p:spPr>
+          <a:xfrm>
+            <a:off x="640080" y="4526280"/>
+            <a:ext cx="10728960" cy="0"/>
+          </a:xfrm>
+          <a:prstGeom prst="rect">
+            <a:avLst/>
+          </a:prstGeom>
+          <a:noFill/>
+          <a:ln/>
+        </p:spPr>
+        <p:txBody>
+          <a:bodyPr wrap="square" rtlCol="0" anchor="ctr"/>
+          <a:lstStyle/>
+          <a:p>
+            <a:pPr indent="0" marL="0">
+              <a:buNone/>
+            </a:pPr>
+            <a:r>
+              <a:rPr lang="en-US" sz="1600" dirty="0">
+                <a:solidFill>
+                  <a:srgbClr val="FFFFFF"/>
+                </a:solidFill>
+              </a:rPr>
+              <a:t>D. Le Parlement</a:t>
             </a:r>
             <a:endParaRPr lang="en-US" sz="1600" dirty="0"/>
           </a:p>
@@ -30612,6 +32782,1586 @@
 </p:sld>
 </file>
 
+<file path=ppt/slides/slide180.xml><?xml version="1.0" encoding="utf-8"?>
+<p:sld xmlns:a="http://schemas.openxmlformats.org/drawingml/2006/main" xmlns:r="http://schemas.openxmlformats.org/officeDocument/2006/relationships" xmlns:p="http://schemas.openxmlformats.org/presentationml/2006/main">
+  <p:cSld name="Slide 180">
+    <p:bg>
+      <p:bgPr>
+        <a:solidFill>
+          <a:srgbClr val="1B3A6B"/>
+        </a:solidFill>
+      </p:bgPr>
+    </p:bg>
+    <p:spTree>
+      <p:nvGrpSpPr>
+        <p:cNvPr id="1" name=""/>
+        <p:cNvGrpSpPr/>
+        <p:nvPr/>
+      </p:nvGrpSpPr>
+      <p:grpSpPr>
+        <a:xfrm>
+          <a:off x="0" y="0"/>
+          <a:ext cx="0" cy="0"/>
+          <a:chOff x="0" y="0"/>
+          <a:chExt cx="0" cy="0"/>
+        </a:xfrm>
+      </p:grpSpPr>
+      <p:sp>
+        <p:nvSpPr>
+          <p:cNvPr id="2" name="Text 0"/>
+          <p:cNvSpPr/>
+          <p:nvPr/>
+        </p:nvSpPr>
+        <p:spPr>
+          <a:xfrm>
+            <a:off x="457200" y="457200"/>
+            <a:ext cx="11216640" cy="0"/>
+          </a:xfrm>
+          <a:prstGeom prst="rect">
+            <a:avLst/>
+          </a:prstGeom>
+          <a:noFill/>
+          <a:ln/>
+        </p:spPr>
+        <p:txBody>
+          <a:bodyPr wrap="square" rtlCol="0" anchor="ctr"/>
+          <a:lstStyle/>
+          <a:p>
+            <a:pPr indent="0" marL="0">
+              <a:buNone/>
+            </a:pPr>
+            <a:r>
+              <a:rPr lang="en-US" sz="2600" b="1" dirty="0">
+                <a:solidFill>
+                  <a:srgbClr val="00FF99"/>
+                </a:solidFill>
+              </a:rPr>
+              <a:t>✅ Réponse : A</a:t>
+            </a:r>
+            <a:endParaRPr lang="en-US" sz="2600" dirty="0"/>
+          </a:p>
+        </p:txBody>
+      </p:sp>
+      <p:sp>
+        <p:nvSpPr>
+          <p:cNvPr id="3" name="Text 1"/>
+          <p:cNvSpPr/>
+          <p:nvPr/>
+        </p:nvSpPr>
+        <p:spPr>
+          <a:xfrm>
+            <a:off x="457200" y="1645920"/>
+            <a:ext cx="11216640" cy="0"/>
+          </a:xfrm>
+          <a:prstGeom prst="rect">
+            <a:avLst/>
+          </a:prstGeom>
+          <a:noFill/>
+          <a:ln/>
+        </p:spPr>
+        <p:txBody>
+          <a:bodyPr wrap="square" rtlCol="0" anchor="ctr"/>
+          <a:lstStyle/>
+          <a:p>
+            <a:pPr indent="0" marL="0">
+              <a:buNone/>
+            </a:pPr>
+            <a:r>
+              <a:rPr lang="en-US" sz="1600" dirty="0">
+                <a:solidFill>
+                  <a:srgbClr val="FFFFFF"/>
+                </a:solidFill>
+              </a:rPr>
+              <a:t>Guide adopté par la CSMS le 12 mai 2026 (méthode par consensus simple).</a:t>
+            </a:r>
+            <a:endParaRPr lang="en-US" sz="1600" dirty="0"/>
+          </a:p>
+        </p:txBody>
+      </p:sp>
+    </p:spTree>
+  </p:cSld>
+  <p:clrMapOvr>
+    <a:masterClrMapping/>
+  </p:clrMapOvr>
+</p:sld>
+</file>
+
+<file path=ppt/slides/slide181.xml><?xml version="1.0" encoding="utf-8"?>
+<p:sld xmlns:a="http://schemas.openxmlformats.org/drawingml/2006/main" xmlns:r="http://schemas.openxmlformats.org/officeDocument/2006/relationships" xmlns:p="http://schemas.openxmlformats.org/presentationml/2006/main">
+  <p:cSld name="Slide 181">
+    <p:bg>
+      <p:bgPr>
+        <a:solidFill>
+          <a:srgbClr val="1B3A6B"/>
+        </a:solidFill>
+      </p:bgPr>
+    </p:bg>
+    <p:spTree>
+      <p:nvGrpSpPr>
+        <p:cNvPr id="1" name=""/>
+        <p:cNvGrpSpPr/>
+        <p:nvPr/>
+      </p:nvGrpSpPr>
+      <p:grpSpPr>
+        <a:xfrm>
+          <a:off x="0" y="0"/>
+          <a:ext cx="0" cy="0"/>
+          <a:chOff x="0" y="0"/>
+          <a:chExt cx="0" cy="0"/>
+        </a:xfrm>
+      </p:grpSpPr>
+      <p:sp>
+        <p:nvSpPr>
+          <p:cNvPr id="2" name="Text 0"/>
+          <p:cNvSpPr/>
+          <p:nvPr/>
+        </p:nvSpPr>
+        <p:spPr>
+          <a:xfrm>
+            <a:off x="457200" y="365760"/>
+            <a:ext cx="11216640" cy="1280160"/>
+          </a:xfrm>
+          <a:prstGeom prst="rect">
+            <a:avLst/>
+          </a:prstGeom>
+          <a:noFill/>
+          <a:ln/>
+        </p:spPr>
+        <p:txBody>
+          <a:bodyPr wrap="square" rtlCol="0" anchor="ctr"/>
+          <a:lstStyle/>
+          <a:p>
+            <a:pPr indent="0" marL="0">
+              <a:buNone/>
+            </a:pPr>
+            <a:r>
+              <a:rPr lang="en-US" sz="2000" b="1" dirty="0">
+                <a:solidFill>
+                  <a:srgbClr val="FFFFFF"/>
+                </a:solidFill>
+              </a:rPr>
+              <a:t>Q91. Avant de recueillir les besoins, l'étape 1.1 du guide consiste à :</a:t>
+            </a:r>
+            <a:endParaRPr lang="en-US" sz="2000" dirty="0"/>
+          </a:p>
+        </p:txBody>
+      </p:sp>
+      <p:sp>
+        <p:nvSpPr>
+          <p:cNvPr id="3" name="Text 1"/>
+          <p:cNvSpPr/>
+          <p:nvPr/>
+        </p:nvSpPr>
+        <p:spPr>
+          <a:xfrm>
+            <a:off x="640080" y="1920240"/>
+            <a:ext cx="10728960" cy="0"/>
+          </a:xfrm>
+          <a:prstGeom prst="rect">
+            <a:avLst/>
+          </a:prstGeom>
+          <a:noFill/>
+          <a:ln/>
+        </p:spPr>
+        <p:txBody>
+          <a:bodyPr wrap="square" rtlCol="0" anchor="ctr"/>
+          <a:lstStyle/>
+          <a:p>
+            <a:pPr indent="0" marL="0">
+              <a:buNone/>
+            </a:pPr>
+            <a:r>
+              <a:rPr lang="en-US" sz="1600" dirty="0">
+                <a:solidFill>
+                  <a:srgbClr val="FFFFFF"/>
+                </a:solidFill>
+              </a:rPr>
+              <a:t>A. Fixer les objectifs</a:t>
+            </a:r>
+            <a:endParaRPr lang="en-US" sz="1600" dirty="0"/>
+          </a:p>
+        </p:txBody>
+      </p:sp>
+      <p:sp>
+        <p:nvSpPr>
+          <p:cNvPr id="4" name="Text 2"/>
+          <p:cNvSpPr/>
+          <p:nvPr/>
+        </p:nvSpPr>
+        <p:spPr>
+          <a:xfrm>
+            <a:off x="640080" y="2788920"/>
+            <a:ext cx="10728960" cy="0"/>
+          </a:xfrm>
+          <a:prstGeom prst="rect">
+            <a:avLst/>
+          </a:prstGeom>
+          <a:noFill/>
+          <a:ln/>
+        </p:spPr>
+        <p:txBody>
+          <a:bodyPr wrap="square" rtlCol="0" anchor="ctr"/>
+          <a:lstStyle/>
+          <a:p>
+            <a:pPr indent="0" marL="0">
+              <a:buNone/>
+            </a:pPr>
+            <a:r>
+              <a:rPr lang="en-US" sz="1600" dirty="0">
+                <a:solidFill>
+                  <a:srgbClr val="FFFFFF"/>
+                </a:solidFill>
+              </a:rPr>
+              <a:t>B. Informer la personne et recueillir son consentement OU son refus</a:t>
+            </a:r>
+            <a:endParaRPr lang="en-US" sz="1600" dirty="0"/>
+          </a:p>
+        </p:txBody>
+      </p:sp>
+      <p:sp>
+        <p:nvSpPr>
+          <p:cNvPr id="5" name="Text 3"/>
+          <p:cNvSpPr/>
+          <p:nvPr/>
+        </p:nvSpPr>
+        <p:spPr>
+          <a:xfrm>
+            <a:off x="640080" y="3657600"/>
+            <a:ext cx="10728960" cy="0"/>
+          </a:xfrm>
+          <a:prstGeom prst="rect">
+            <a:avLst/>
+          </a:prstGeom>
+          <a:noFill/>
+          <a:ln/>
+        </p:spPr>
+        <p:txBody>
+          <a:bodyPr wrap="square" rtlCol="0" anchor="ctr"/>
+          <a:lstStyle/>
+          <a:p>
+            <a:pPr indent="0" marL="0">
+              <a:buNone/>
+            </a:pPr>
+            <a:r>
+              <a:rPr lang="en-US" sz="1600" dirty="0">
+                <a:solidFill>
+                  <a:srgbClr val="FFFFFF"/>
+                </a:solidFill>
+              </a:rPr>
+              <a:t>C. Saisir le DUI</a:t>
+            </a:r>
+            <a:endParaRPr lang="en-US" sz="1600" dirty="0"/>
+          </a:p>
+        </p:txBody>
+      </p:sp>
+      <p:sp>
+        <p:nvSpPr>
+          <p:cNvPr id="6" name="Text 4"/>
+          <p:cNvSpPr/>
+          <p:nvPr/>
+        </p:nvSpPr>
+        <p:spPr>
+          <a:xfrm>
+            <a:off x="640080" y="4526280"/>
+            <a:ext cx="10728960" cy="0"/>
+          </a:xfrm>
+          <a:prstGeom prst="rect">
+            <a:avLst/>
+          </a:prstGeom>
+          <a:noFill/>
+          <a:ln/>
+        </p:spPr>
+        <p:txBody>
+          <a:bodyPr wrap="square" rtlCol="0" anchor="ctr"/>
+          <a:lstStyle/>
+          <a:p>
+            <a:pPr indent="0" marL="0">
+              <a:buNone/>
+            </a:pPr>
+            <a:r>
+              <a:rPr lang="en-US" sz="1600" dirty="0">
+                <a:solidFill>
+                  <a:srgbClr val="FFFFFF"/>
+                </a:solidFill>
+              </a:rPr>
+              <a:t>D. Signer le contrat</a:t>
+            </a:r>
+            <a:endParaRPr lang="en-US" sz="1600" dirty="0"/>
+          </a:p>
+        </p:txBody>
+      </p:sp>
+    </p:spTree>
+  </p:cSld>
+  <p:clrMapOvr>
+    <a:masterClrMapping/>
+  </p:clrMapOvr>
+</p:sld>
+</file>
+
+<file path=ppt/slides/slide182.xml><?xml version="1.0" encoding="utf-8"?>
+<p:sld xmlns:a="http://schemas.openxmlformats.org/drawingml/2006/main" xmlns:r="http://schemas.openxmlformats.org/officeDocument/2006/relationships" xmlns:p="http://schemas.openxmlformats.org/presentationml/2006/main">
+  <p:cSld name="Slide 182">
+    <p:bg>
+      <p:bgPr>
+        <a:solidFill>
+          <a:srgbClr val="1B3A6B"/>
+        </a:solidFill>
+      </p:bgPr>
+    </p:bg>
+    <p:spTree>
+      <p:nvGrpSpPr>
+        <p:cNvPr id="1" name=""/>
+        <p:cNvGrpSpPr/>
+        <p:nvPr/>
+      </p:nvGrpSpPr>
+      <p:grpSpPr>
+        <a:xfrm>
+          <a:off x="0" y="0"/>
+          <a:ext cx="0" cy="0"/>
+          <a:chOff x="0" y="0"/>
+          <a:chExt cx="0" cy="0"/>
+        </a:xfrm>
+      </p:grpSpPr>
+      <p:sp>
+        <p:nvSpPr>
+          <p:cNvPr id="2" name="Text 0"/>
+          <p:cNvSpPr/>
+          <p:nvPr/>
+        </p:nvSpPr>
+        <p:spPr>
+          <a:xfrm>
+            <a:off x="457200" y="457200"/>
+            <a:ext cx="11216640" cy="0"/>
+          </a:xfrm>
+          <a:prstGeom prst="rect">
+            <a:avLst/>
+          </a:prstGeom>
+          <a:noFill/>
+          <a:ln/>
+        </p:spPr>
+        <p:txBody>
+          <a:bodyPr wrap="square" rtlCol="0" anchor="ctr"/>
+          <a:lstStyle/>
+          <a:p>
+            <a:pPr indent="0" marL="0">
+              <a:buNone/>
+            </a:pPr>
+            <a:r>
+              <a:rPr lang="en-US" sz="2600" b="1" dirty="0">
+                <a:solidFill>
+                  <a:srgbClr val="00FF99"/>
+                </a:solidFill>
+              </a:rPr>
+              <a:t>✅ Réponse : B</a:t>
+            </a:r>
+            <a:endParaRPr lang="en-US" sz="2600" dirty="0"/>
+          </a:p>
+        </p:txBody>
+      </p:sp>
+      <p:sp>
+        <p:nvSpPr>
+          <p:cNvPr id="3" name="Text 1"/>
+          <p:cNvSpPr/>
+          <p:nvPr/>
+        </p:nvSpPr>
+        <p:spPr>
+          <a:xfrm>
+            <a:off x="457200" y="1645920"/>
+            <a:ext cx="11216640" cy="0"/>
+          </a:xfrm>
+          <a:prstGeom prst="rect">
+            <a:avLst/>
+          </a:prstGeom>
+          <a:noFill/>
+          <a:ln/>
+        </p:spPr>
+        <p:txBody>
+          <a:bodyPr wrap="square" rtlCol="0" anchor="ctr"/>
+          <a:lstStyle/>
+          <a:p>
+            <a:pPr indent="0" marL="0">
+              <a:buNone/>
+            </a:pPr>
+            <a:r>
+              <a:rPr lang="en-US" sz="1600" dirty="0">
+                <a:solidFill>
+                  <a:srgbClr val="FFFFFF"/>
+                </a:solidFill>
+              </a:rPr>
+              <a:t>Le guide débute par l'information de la personne et le recueil de son consentement ou refus.</a:t>
+            </a:r>
+            <a:endParaRPr lang="en-US" sz="1600" dirty="0"/>
+          </a:p>
+        </p:txBody>
+      </p:sp>
+    </p:spTree>
+  </p:cSld>
+  <p:clrMapOvr>
+    <a:masterClrMapping/>
+  </p:clrMapOvr>
+</p:sld>
+</file>
+
+<file path=ppt/slides/slide183.xml><?xml version="1.0" encoding="utf-8"?>
+<p:sld xmlns:a="http://schemas.openxmlformats.org/drawingml/2006/main" xmlns:r="http://schemas.openxmlformats.org/officeDocument/2006/relationships" xmlns:p="http://schemas.openxmlformats.org/presentationml/2006/main">
+  <p:cSld name="Slide 183">
+    <p:bg>
+      <p:bgPr>
+        <a:solidFill>
+          <a:srgbClr val="1B3A6B"/>
+        </a:solidFill>
+      </p:bgPr>
+    </p:bg>
+    <p:spTree>
+      <p:nvGrpSpPr>
+        <p:cNvPr id="1" name=""/>
+        <p:cNvGrpSpPr/>
+        <p:nvPr/>
+      </p:nvGrpSpPr>
+      <p:grpSpPr>
+        <a:xfrm>
+          <a:off x="0" y="0"/>
+          <a:ext cx="0" cy="0"/>
+          <a:chOff x="0" y="0"/>
+          <a:chExt cx="0" cy="0"/>
+        </a:xfrm>
+      </p:grpSpPr>
+      <p:sp>
+        <p:nvSpPr>
+          <p:cNvPr id="2" name="Text 0"/>
+          <p:cNvSpPr/>
+          <p:nvPr/>
+        </p:nvSpPr>
+        <p:spPr>
+          <a:xfrm>
+            <a:off x="457200" y="365760"/>
+            <a:ext cx="11216640" cy="1280160"/>
+          </a:xfrm>
+          <a:prstGeom prst="rect">
+            <a:avLst/>
+          </a:prstGeom>
+          <a:noFill/>
+          <a:ln/>
+        </p:spPr>
+        <p:txBody>
+          <a:bodyPr wrap="square" rtlCol="0" anchor="ctr"/>
+          <a:lstStyle/>
+          <a:p>
+            <a:pPr indent="0" marL="0">
+              <a:buNone/>
+            </a:pPr>
+            <a:r>
+              <a:rPr lang="en-US" sz="2000" b="1" dirty="0">
+                <a:solidFill>
+                  <a:srgbClr val="FFFFFF"/>
+                </a:solidFill>
+              </a:rPr>
+              <a:t>Q92. Le guide recueille les besoins, les attentes et aussi :</a:t>
+            </a:r>
+            <a:endParaRPr lang="en-US" sz="2000" dirty="0"/>
+          </a:p>
+        </p:txBody>
+      </p:sp>
+      <p:sp>
+        <p:nvSpPr>
+          <p:cNvPr id="3" name="Text 1"/>
+          <p:cNvSpPr/>
+          <p:nvPr/>
+        </p:nvSpPr>
+        <p:spPr>
+          <a:xfrm>
+            <a:off x="640080" y="1920240"/>
+            <a:ext cx="10728960" cy="0"/>
+          </a:xfrm>
+          <a:prstGeom prst="rect">
+            <a:avLst/>
+          </a:prstGeom>
+          <a:noFill/>
+          <a:ln/>
+        </p:spPr>
+        <p:txBody>
+          <a:bodyPr wrap="square" rtlCol="0" anchor="ctr"/>
+          <a:lstStyle/>
+          <a:p>
+            <a:pPr indent="0" marL="0">
+              <a:buNone/>
+            </a:pPr>
+            <a:r>
+              <a:rPr lang="en-US" sz="1600" dirty="0">
+                <a:solidFill>
+                  <a:srgbClr val="FFFFFF"/>
+                </a:solidFill>
+              </a:rPr>
+              <a:t>A. Les revenus</a:t>
+            </a:r>
+            <a:endParaRPr lang="en-US" sz="1600" dirty="0"/>
+          </a:p>
+        </p:txBody>
+      </p:sp>
+      <p:sp>
+        <p:nvSpPr>
+          <p:cNvPr id="4" name="Text 2"/>
+          <p:cNvSpPr/>
+          <p:nvPr/>
+        </p:nvSpPr>
+        <p:spPr>
+          <a:xfrm>
+            <a:off x="640080" y="2788920"/>
+            <a:ext cx="10728960" cy="0"/>
+          </a:xfrm>
+          <a:prstGeom prst="rect">
+            <a:avLst/>
+          </a:prstGeom>
+          <a:noFill/>
+          <a:ln/>
+        </p:spPr>
+        <p:txBody>
+          <a:bodyPr wrap="square" rtlCol="0" anchor="ctr"/>
+          <a:lstStyle/>
+          <a:p>
+            <a:pPr indent="0" marL="0">
+              <a:buNone/>
+            </a:pPr>
+            <a:r>
+              <a:rPr lang="en-US" sz="1600" dirty="0">
+                <a:solidFill>
+                  <a:srgbClr val="FFFFFF"/>
+                </a:solidFill>
+              </a:rPr>
+              <a:t>B. Les désirs de la personne</a:t>
+            </a:r>
+            <a:endParaRPr lang="en-US" sz="1600" dirty="0"/>
+          </a:p>
+        </p:txBody>
+      </p:sp>
+      <p:sp>
+        <p:nvSpPr>
+          <p:cNvPr id="5" name="Text 3"/>
+          <p:cNvSpPr/>
+          <p:nvPr/>
+        </p:nvSpPr>
+        <p:spPr>
+          <a:xfrm>
+            <a:off x="640080" y="3657600"/>
+            <a:ext cx="10728960" cy="0"/>
+          </a:xfrm>
+          <a:prstGeom prst="rect">
+            <a:avLst/>
+          </a:prstGeom>
+          <a:noFill/>
+          <a:ln/>
+        </p:spPr>
+        <p:txBody>
+          <a:bodyPr wrap="square" rtlCol="0" anchor="ctr"/>
+          <a:lstStyle/>
+          <a:p>
+            <a:pPr indent="0" marL="0">
+              <a:buNone/>
+            </a:pPr>
+            <a:r>
+              <a:rPr lang="en-US" sz="1600" dirty="0">
+                <a:solidFill>
+                  <a:srgbClr val="FFFFFF"/>
+                </a:solidFill>
+              </a:rPr>
+              <a:t>C. Les diagnostics seuls</a:t>
+            </a:r>
+            <a:endParaRPr lang="en-US" sz="1600" dirty="0"/>
+          </a:p>
+        </p:txBody>
+      </p:sp>
+      <p:sp>
+        <p:nvSpPr>
+          <p:cNvPr id="6" name="Text 4"/>
+          <p:cNvSpPr/>
+          <p:nvPr/>
+        </p:nvSpPr>
+        <p:spPr>
+          <a:xfrm>
+            <a:off x="640080" y="4526280"/>
+            <a:ext cx="10728960" cy="0"/>
+          </a:xfrm>
+          <a:prstGeom prst="rect">
+            <a:avLst/>
+          </a:prstGeom>
+          <a:noFill/>
+          <a:ln/>
+        </p:spPr>
+        <p:txBody>
+          <a:bodyPr wrap="square" rtlCol="0" anchor="ctr"/>
+          <a:lstStyle/>
+          <a:p>
+            <a:pPr indent="0" marL="0">
+              <a:buNone/>
+            </a:pPr>
+            <a:r>
+              <a:rPr lang="en-US" sz="1600" dirty="0">
+                <a:solidFill>
+                  <a:srgbClr val="FFFFFF"/>
+                </a:solidFill>
+              </a:rPr>
+              <a:t>D. Les avis de l'ARS</a:t>
+            </a:r>
+            <a:endParaRPr lang="en-US" sz="1600" dirty="0"/>
+          </a:p>
+        </p:txBody>
+      </p:sp>
+    </p:spTree>
+  </p:cSld>
+  <p:clrMapOvr>
+    <a:masterClrMapping/>
+  </p:clrMapOvr>
+</p:sld>
+</file>
+
+<file path=ppt/slides/slide184.xml><?xml version="1.0" encoding="utf-8"?>
+<p:sld xmlns:a="http://schemas.openxmlformats.org/drawingml/2006/main" xmlns:r="http://schemas.openxmlformats.org/officeDocument/2006/relationships" xmlns:p="http://schemas.openxmlformats.org/presentationml/2006/main">
+  <p:cSld name="Slide 184">
+    <p:bg>
+      <p:bgPr>
+        <a:solidFill>
+          <a:srgbClr val="1B3A6B"/>
+        </a:solidFill>
+      </p:bgPr>
+    </p:bg>
+    <p:spTree>
+      <p:nvGrpSpPr>
+        <p:cNvPr id="1" name=""/>
+        <p:cNvGrpSpPr/>
+        <p:nvPr/>
+      </p:nvGrpSpPr>
+      <p:grpSpPr>
+        <a:xfrm>
+          <a:off x="0" y="0"/>
+          <a:ext cx="0" cy="0"/>
+          <a:chOff x="0" y="0"/>
+          <a:chExt cx="0" cy="0"/>
+        </a:xfrm>
+      </p:grpSpPr>
+      <p:sp>
+        <p:nvSpPr>
+          <p:cNvPr id="2" name="Text 0"/>
+          <p:cNvSpPr/>
+          <p:nvPr/>
+        </p:nvSpPr>
+        <p:spPr>
+          <a:xfrm>
+            <a:off x="457200" y="457200"/>
+            <a:ext cx="11216640" cy="0"/>
+          </a:xfrm>
+          <a:prstGeom prst="rect">
+            <a:avLst/>
+          </a:prstGeom>
+          <a:noFill/>
+          <a:ln/>
+        </p:spPr>
+        <p:txBody>
+          <a:bodyPr wrap="square" rtlCol="0" anchor="ctr"/>
+          <a:lstStyle/>
+          <a:p>
+            <a:pPr indent="0" marL="0">
+              <a:buNone/>
+            </a:pPr>
+            <a:r>
+              <a:rPr lang="en-US" sz="2600" b="1" dirty="0">
+                <a:solidFill>
+                  <a:srgbClr val="00FF99"/>
+                </a:solidFill>
+              </a:rPr>
+              <a:t>✅ Réponse : B</a:t>
+            </a:r>
+            <a:endParaRPr lang="en-US" sz="2600" dirty="0"/>
+          </a:p>
+        </p:txBody>
+      </p:sp>
+      <p:sp>
+        <p:nvSpPr>
+          <p:cNvPr id="3" name="Text 1"/>
+          <p:cNvSpPr/>
+          <p:nvPr/>
+        </p:nvSpPr>
+        <p:spPr>
+          <a:xfrm>
+            <a:off x="457200" y="1645920"/>
+            <a:ext cx="11216640" cy="0"/>
+          </a:xfrm>
+          <a:prstGeom prst="rect">
+            <a:avLst/>
+          </a:prstGeom>
+          <a:noFill/>
+          <a:ln/>
+        </p:spPr>
+        <p:txBody>
+          <a:bodyPr wrap="square" rtlCol="0" anchor="ctr"/>
+          <a:lstStyle/>
+          <a:p>
+            <a:pPr indent="0" marL="0">
+              <a:buNone/>
+            </a:pPr>
+            <a:r>
+              <a:rPr lang="en-US" sz="1600" dirty="0">
+                <a:solidFill>
+                  <a:srgbClr val="FFFFFF"/>
+                </a:solidFill>
+              </a:rPr>
+              <a:t>Recueil des besoins, attentes ET désirs de la personne (chap. 1.2).</a:t>
+            </a:r>
+            <a:endParaRPr lang="en-US" sz="1600" dirty="0"/>
+          </a:p>
+        </p:txBody>
+      </p:sp>
+    </p:spTree>
+  </p:cSld>
+  <p:clrMapOvr>
+    <a:masterClrMapping/>
+  </p:clrMapOvr>
+</p:sld>
+</file>
+
+<file path=ppt/slides/slide185.xml><?xml version="1.0" encoding="utf-8"?>
+<p:sld xmlns:a="http://schemas.openxmlformats.org/drawingml/2006/main" xmlns:r="http://schemas.openxmlformats.org/officeDocument/2006/relationships" xmlns:p="http://schemas.openxmlformats.org/presentationml/2006/main">
+  <p:cSld name="Slide 185">
+    <p:bg>
+      <p:bgPr>
+        <a:solidFill>
+          <a:srgbClr val="1B3A6B"/>
+        </a:solidFill>
+      </p:bgPr>
+    </p:bg>
+    <p:spTree>
+      <p:nvGrpSpPr>
+        <p:cNvPr id="1" name=""/>
+        <p:cNvGrpSpPr/>
+        <p:nvPr/>
+      </p:nvGrpSpPr>
+      <p:grpSpPr>
+        <a:xfrm>
+          <a:off x="0" y="0"/>
+          <a:ext cx="0" cy="0"/>
+          <a:chOff x="0" y="0"/>
+          <a:chExt cx="0" cy="0"/>
+        </a:xfrm>
+      </p:grpSpPr>
+      <p:sp>
+        <p:nvSpPr>
+          <p:cNvPr id="2" name="Text 0"/>
+          <p:cNvSpPr/>
+          <p:nvPr/>
+        </p:nvSpPr>
+        <p:spPr>
+          <a:xfrm>
+            <a:off x="457200" y="365760"/>
+            <a:ext cx="11216640" cy="1280160"/>
+          </a:xfrm>
+          <a:prstGeom prst="rect">
+            <a:avLst/>
+          </a:prstGeom>
+          <a:noFill/>
+          <a:ln/>
+        </p:spPr>
+        <p:txBody>
+          <a:bodyPr wrap="square" rtlCol="0" anchor="ctr"/>
+          <a:lstStyle/>
+          <a:p>
+            <a:pPr indent="0" marL="0">
+              <a:buNone/>
+            </a:pPr>
+            <a:r>
+              <a:rPr lang="en-US" sz="2000" b="1" dirty="0">
+                <a:solidFill>
+                  <a:srgbClr val="FFFFFF"/>
+                </a:solidFill>
+              </a:rPr>
+              <a:t>Q93. Le PPA, souvent un « document plat » non évolutif, doit devenir :</a:t>
+            </a:r>
+            <a:endParaRPr lang="en-US" sz="2000" dirty="0"/>
+          </a:p>
+        </p:txBody>
+      </p:sp>
+      <p:sp>
+        <p:nvSpPr>
+          <p:cNvPr id="3" name="Text 1"/>
+          <p:cNvSpPr/>
+          <p:nvPr/>
+        </p:nvSpPr>
+        <p:spPr>
+          <a:xfrm>
+            <a:off x="640080" y="1920240"/>
+            <a:ext cx="10728960" cy="0"/>
+          </a:xfrm>
+          <a:prstGeom prst="rect">
+            <a:avLst/>
+          </a:prstGeom>
+          <a:noFill/>
+          <a:ln/>
+        </p:spPr>
+        <p:txBody>
+          <a:bodyPr wrap="square" rtlCol="0" anchor="ctr"/>
+          <a:lstStyle/>
+          <a:p>
+            <a:pPr indent="0" marL="0">
+              <a:buNone/>
+            </a:pPr>
+            <a:r>
+              <a:rPr lang="en-US" sz="1600" dirty="0">
+                <a:solidFill>
+                  <a:srgbClr val="FFFFFF"/>
+                </a:solidFill>
+              </a:rPr>
+              <a:t>A. Un PDF figé</a:t>
+            </a:r>
+            <a:endParaRPr lang="en-US" sz="1600" dirty="0"/>
+          </a:p>
+        </p:txBody>
+      </p:sp>
+      <p:sp>
+        <p:nvSpPr>
+          <p:cNvPr id="4" name="Text 2"/>
+          <p:cNvSpPr/>
+          <p:nvPr/>
+        </p:nvSpPr>
+        <p:spPr>
+          <a:xfrm>
+            <a:off x="640080" y="2788920"/>
+            <a:ext cx="10728960" cy="0"/>
+          </a:xfrm>
+          <a:prstGeom prst="rect">
+            <a:avLst/>
+          </a:prstGeom>
+          <a:noFill/>
+          <a:ln/>
+        </p:spPr>
+        <p:txBody>
+          <a:bodyPr wrap="square" rtlCol="0" anchor="ctr"/>
+          <a:lstStyle/>
+          <a:p>
+            <a:pPr indent="0" marL="0">
+              <a:buNone/>
+            </a:pPr>
+            <a:r>
+              <a:rPr lang="en-US" sz="1600" dirty="0">
+                <a:solidFill>
+                  <a:srgbClr val="FFFFFF"/>
+                </a:solidFill>
+              </a:rPr>
+              <a:t>B. Un élément dynamique et cyclique (réévaluation)</a:t>
+            </a:r>
+            <a:endParaRPr lang="en-US" sz="1600" dirty="0"/>
+          </a:p>
+        </p:txBody>
+      </p:sp>
+      <p:sp>
+        <p:nvSpPr>
+          <p:cNvPr id="5" name="Text 3"/>
+          <p:cNvSpPr/>
+          <p:nvPr/>
+        </p:nvSpPr>
+        <p:spPr>
+          <a:xfrm>
+            <a:off x="640080" y="3657600"/>
+            <a:ext cx="10728960" cy="0"/>
+          </a:xfrm>
+          <a:prstGeom prst="rect">
+            <a:avLst/>
+          </a:prstGeom>
+          <a:noFill/>
+          <a:ln/>
+        </p:spPr>
+        <p:txBody>
+          <a:bodyPr wrap="square" rtlCol="0" anchor="ctr"/>
+          <a:lstStyle/>
+          <a:p>
+            <a:pPr indent="0" marL="0">
+              <a:buNone/>
+            </a:pPr>
+            <a:r>
+              <a:rPr lang="en-US" sz="1600" dirty="0">
+                <a:solidFill>
+                  <a:srgbClr val="FFFFFF"/>
+                </a:solidFill>
+              </a:rPr>
+              <a:t>C. Un tableau Excel</a:t>
+            </a:r>
+            <a:endParaRPr lang="en-US" sz="1600" dirty="0"/>
+          </a:p>
+        </p:txBody>
+      </p:sp>
+      <p:sp>
+        <p:nvSpPr>
+          <p:cNvPr id="6" name="Text 4"/>
+          <p:cNvSpPr/>
+          <p:nvPr/>
+        </p:nvSpPr>
+        <p:spPr>
+          <a:xfrm>
+            <a:off x="640080" y="4526280"/>
+            <a:ext cx="10728960" cy="0"/>
+          </a:xfrm>
+          <a:prstGeom prst="rect">
+            <a:avLst/>
+          </a:prstGeom>
+          <a:noFill/>
+          <a:ln/>
+        </p:spPr>
+        <p:txBody>
+          <a:bodyPr wrap="square" rtlCol="0" anchor="ctr"/>
+          <a:lstStyle/>
+          <a:p>
+            <a:pPr indent="0" marL="0">
+              <a:buNone/>
+            </a:pPr>
+            <a:r>
+              <a:rPr lang="en-US" sz="1600" dirty="0">
+                <a:solidFill>
+                  <a:srgbClr val="FFFFFF"/>
+                </a:solidFill>
+              </a:rPr>
+              <a:t>D. Un document annuel unique</a:t>
+            </a:r>
+            <a:endParaRPr lang="en-US" sz="1600" dirty="0"/>
+          </a:p>
+        </p:txBody>
+      </p:sp>
+    </p:spTree>
+  </p:cSld>
+  <p:clrMapOvr>
+    <a:masterClrMapping/>
+  </p:clrMapOvr>
+</p:sld>
+</file>
+
+<file path=ppt/slides/slide186.xml><?xml version="1.0" encoding="utf-8"?>
+<p:sld xmlns:a="http://schemas.openxmlformats.org/drawingml/2006/main" xmlns:r="http://schemas.openxmlformats.org/officeDocument/2006/relationships" xmlns:p="http://schemas.openxmlformats.org/presentationml/2006/main">
+  <p:cSld name="Slide 186">
+    <p:bg>
+      <p:bgPr>
+        <a:solidFill>
+          <a:srgbClr val="1B3A6B"/>
+        </a:solidFill>
+      </p:bgPr>
+    </p:bg>
+    <p:spTree>
+      <p:nvGrpSpPr>
+        <p:cNvPr id="1" name=""/>
+        <p:cNvGrpSpPr/>
+        <p:nvPr/>
+      </p:nvGrpSpPr>
+      <p:grpSpPr>
+        <a:xfrm>
+          <a:off x="0" y="0"/>
+          <a:ext cx="0" cy="0"/>
+          <a:chOff x="0" y="0"/>
+          <a:chExt cx="0" cy="0"/>
+        </a:xfrm>
+      </p:grpSpPr>
+      <p:sp>
+        <p:nvSpPr>
+          <p:cNvPr id="2" name="Text 0"/>
+          <p:cNvSpPr/>
+          <p:nvPr/>
+        </p:nvSpPr>
+        <p:spPr>
+          <a:xfrm>
+            <a:off x="457200" y="457200"/>
+            <a:ext cx="11216640" cy="0"/>
+          </a:xfrm>
+          <a:prstGeom prst="rect">
+            <a:avLst/>
+          </a:prstGeom>
+          <a:noFill/>
+          <a:ln/>
+        </p:spPr>
+        <p:txBody>
+          <a:bodyPr wrap="square" rtlCol="0" anchor="ctr"/>
+          <a:lstStyle/>
+          <a:p>
+            <a:pPr indent="0" marL="0">
+              <a:buNone/>
+            </a:pPr>
+            <a:r>
+              <a:rPr lang="en-US" sz="2600" b="1" dirty="0">
+                <a:solidFill>
+                  <a:srgbClr val="00FF99"/>
+                </a:solidFill>
+              </a:rPr>
+              <a:t>✅ Réponse : B</a:t>
+            </a:r>
+            <a:endParaRPr lang="en-US" sz="2600" dirty="0"/>
+          </a:p>
+        </p:txBody>
+      </p:sp>
+      <p:sp>
+        <p:nvSpPr>
+          <p:cNvPr id="3" name="Text 1"/>
+          <p:cNvSpPr/>
+          <p:nvPr/>
+        </p:nvSpPr>
+        <p:spPr>
+          <a:xfrm>
+            <a:off x="457200" y="1645920"/>
+            <a:ext cx="11216640" cy="0"/>
+          </a:xfrm>
+          <a:prstGeom prst="rect">
+            <a:avLst/>
+          </a:prstGeom>
+          <a:noFill/>
+          <a:ln/>
+        </p:spPr>
+        <p:txBody>
+          <a:bodyPr wrap="square" rtlCol="0" anchor="ctr"/>
+          <a:lstStyle/>
+          <a:p>
+            <a:pPr indent="0" marL="0">
+              <a:buNone/>
+            </a:pPr>
+            <a:r>
+              <a:rPr lang="en-US" sz="1600" dirty="0">
+                <a:solidFill>
+                  <a:srgbClr val="FFFFFF"/>
+                </a:solidFill>
+              </a:rPr>
+              <a:t>Le guide promeut un PPA dynamique et cyclique, contre le « document plat ».</a:t>
+            </a:r>
+            <a:endParaRPr lang="en-US" sz="1600" dirty="0"/>
+          </a:p>
+        </p:txBody>
+      </p:sp>
+    </p:spTree>
+  </p:cSld>
+  <p:clrMapOvr>
+    <a:masterClrMapping/>
+  </p:clrMapOvr>
+</p:sld>
+</file>
+
+<file path=ppt/slides/slide187.xml><?xml version="1.0" encoding="utf-8"?>
+<p:sld xmlns:a="http://schemas.openxmlformats.org/drawingml/2006/main" xmlns:r="http://schemas.openxmlformats.org/officeDocument/2006/relationships" xmlns:p="http://schemas.openxmlformats.org/presentationml/2006/main">
+  <p:cSld name="Slide 187">
+    <p:bg>
+      <p:bgPr>
+        <a:solidFill>
+          <a:srgbClr val="1B3A6B"/>
+        </a:solidFill>
+      </p:bgPr>
+    </p:bg>
+    <p:spTree>
+      <p:nvGrpSpPr>
+        <p:cNvPr id="1" name=""/>
+        <p:cNvGrpSpPr/>
+        <p:nvPr/>
+      </p:nvGrpSpPr>
+      <p:grpSpPr>
+        <a:xfrm>
+          <a:off x="0" y="0"/>
+          <a:ext cx="0" cy="0"/>
+          <a:chOff x="0" y="0"/>
+          <a:chExt cx="0" cy="0"/>
+        </a:xfrm>
+      </p:grpSpPr>
+      <p:sp>
+        <p:nvSpPr>
+          <p:cNvPr id="2" name="Text 0"/>
+          <p:cNvSpPr/>
+          <p:nvPr/>
+        </p:nvSpPr>
+        <p:spPr>
+          <a:xfrm>
+            <a:off x="457200" y="365760"/>
+            <a:ext cx="11216640" cy="1280160"/>
+          </a:xfrm>
+          <a:prstGeom prst="rect">
+            <a:avLst/>
+          </a:prstGeom>
+          <a:noFill/>
+          <a:ln/>
+        </p:spPr>
+        <p:txBody>
+          <a:bodyPr wrap="square" rtlCol="0" anchor="ctr"/>
+          <a:lstStyle/>
+          <a:p>
+            <a:pPr indent="0" marL="0">
+              <a:buNone/>
+            </a:pPr>
+            <a:r>
+              <a:rPr lang="en-US" sz="2000" b="1" dirty="0">
+                <a:solidFill>
+                  <a:srgbClr val="FFFFFF"/>
+                </a:solidFill>
+              </a:rPr>
+              <a:t>Q94. Le PPA peut notamment alimenter :</a:t>
+            </a:r>
+            <a:endParaRPr lang="en-US" sz="2000" dirty="0"/>
+          </a:p>
+        </p:txBody>
+      </p:sp>
+      <p:sp>
+        <p:nvSpPr>
+          <p:cNvPr id="3" name="Text 1"/>
+          <p:cNvSpPr/>
+          <p:nvPr/>
+        </p:nvSpPr>
+        <p:spPr>
+          <a:xfrm>
+            <a:off x="640080" y="1920240"/>
+            <a:ext cx="10728960" cy="0"/>
+          </a:xfrm>
+          <a:prstGeom prst="rect">
+            <a:avLst/>
+          </a:prstGeom>
+          <a:noFill/>
+          <a:ln/>
+        </p:spPr>
+        <p:txBody>
+          <a:bodyPr wrap="square" rtlCol="0" anchor="ctr"/>
+          <a:lstStyle/>
+          <a:p>
+            <a:pPr indent="0" marL="0">
+              <a:buNone/>
+            </a:pPr>
+            <a:r>
+              <a:rPr lang="en-US" sz="1600" dirty="0">
+                <a:solidFill>
+                  <a:srgbClr val="FFFFFF"/>
+                </a:solidFill>
+              </a:rPr>
+              <a:t>A. Le DMP supprimé</a:t>
+            </a:r>
+            <a:endParaRPr lang="en-US" sz="1600" dirty="0"/>
+          </a:p>
+        </p:txBody>
+      </p:sp>
+      <p:sp>
+        <p:nvSpPr>
+          <p:cNvPr id="4" name="Text 2"/>
+          <p:cNvSpPr/>
+          <p:nvPr/>
+        </p:nvSpPr>
+        <p:spPr>
+          <a:xfrm>
+            <a:off x="640080" y="2788920"/>
+            <a:ext cx="10728960" cy="0"/>
+          </a:xfrm>
+          <a:prstGeom prst="rect">
+            <a:avLst/>
+          </a:prstGeom>
+          <a:noFill/>
+          <a:ln/>
+        </p:spPr>
+        <p:txBody>
+          <a:bodyPr wrap="square" rtlCol="0" anchor="ctr"/>
+          <a:lstStyle/>
+          <a:p>
+            <a:pPr indent="0" marL="0">
+              <a:buNone/>
+            </a:pPr>
+            <a:r>
+              <a:rPr lang="en-US" sz="1600" dirty="0">
+                <a:solidFill>
+                  <a:srgbClr val="FFFFFF"/>
+                </a:solidFill>
+              </a:rPr>
+              <a:t>B. Mon espace santé</a:t>
+            </a:r>
+            <a:endParaRPr lang="en-US" sz="1600" dirty="0"/>
+          </a:p>
+        </p:txBody>
+      </p:sp>
+      <p:sp>
+        <p:nvSpPr>
+          <p:cNvPr id="5" name="Text 3"/>
+          <p:cNvSpPr/>
+          <p:nvPr/>
+        </p:nvSpPr>
+        <p:spPr>
+          <a:xfrm>
+            <a:off x="640080" y="3657600"/>
+            <a:ext cx="10728960" cy="0"/>
+          </a:xfrm>
+          <a:prstGeom prst="rect">
+            <a:avLst/>
+          </a:prstGeom>
+          <a:noFill/>
+          <a:ln/>
+        </p:spPr>
+        <p:txBody>
+          <a:bodyPr wrap="square" rtlCol="0" anchor="ctr"/>
+          <a:lstStyle/>
+          <a:p>
+            <a:pPr indent="0" marL="0">
+              <a:buNone/>
+            </a:pPr>
+            <a:r>
+              <a:rPr lang="en-US" sz="1600" dirty="0">
+                <a:solidFill>
+                  <a:srgbClr val="FFFFFF"/>
+                </a:solidFill>
+              </a:rPr>
+              <a:t>C. Un cloud personnel</a:t>
+            </a:r>
+            <a:endParaRPr lang="en-US" sz="1600" dirty="0"/>
+          </a:p>
+        </p:txBody>
+      </p:sp>
+      <p:sp>
+        <p:nvSpPr>
+          <p:cNvPr id="6" name="Text 4"/>
+          <p:cNvSpPr/>
+          <p:nvPr/>
+        </p:nvSpPr>
+        <p:spPr>
+          <a:xfrm>
+            <a:off x="640080" y="4526280"/>
+            <a:ext cx="10728960" cy="0"/>
+          </a:xfrm>
+          <a:prstGeom prst="rect">
+            <a:avLst/>
+          </a:prstGeom>
+          <a:noFill/>
+          <a:ln/>
+        </p:spPr>
+        <p:txBody>
+          <a:bodyPr wrap="square" rtlCol="0" anchor="ctr"/>
+          <a:lstStyle/>
+          <a:p>
+            <a:pPr indent="0" marL="0">
+              <a:buNone/>
+            </a:pPr>
+            <a:r>
+              <a:rPr lang="en-US" sz="1600" dirty="0">
+                <a:solidFill>
+                  <a:srgbClr val="FFFFFF"/>
+                </a:solidFill>
+              </a:rPr>
+              <a:t>D. Aucun service national</a:t>
+            </a:r>
+            <a:endParaRPr lang="en-US" sz="1600" dirty="0"/>
+          </a:p>
+        </p:txBody>
+      </p:sp>
+    </p:spTree>
+  </p:cSld>
+  <p:clrMapOvr>
+    <a:masterClrMapping/>
+  </p:clrMapOvr>
+</p:sld>
+</file>
+
+<file path=ppt/slides/slide188.xml><?xml version="1.0" encoding="utf-8"?>
+<p:sld xmlns:a="http://schemas.openxmlformats.org/drawingml/2006/main" xmlns:r="http://schemas.openxmlformats.org/officeDocument/2006/relationships" xmlns:p="http://schemas.openxmlformats.org/presentationml/2006/main">
+  <p:cSld name="Slide 188">
+    <p:bg>
+      <p:bgPr>
+        <a:solidFill>
+          <a:srgbClr val="1B3A6B"/>
+        </a:solidFill>
+      </p:bgPr>
+    </p:bg>
+    <p:spTree>
+      <p:nvGrpSpPr>
+        <p:cNvPr id="1" name=""/>
+        <p:cNvGrpSpPr/>
+        <p:nvPr/>
+      </p:nvGrpSpPr>
+      <p:grpSpPr>
+        <a:xfrm>
+          <a:off x="0" y="0"/>
+          <a:ext cx="0" cy="0"/>
+          <a:chOff x="0" y="0"/>
+          <a:chExt cx="0" cy="0"/>
+        </a:xfrm>
+      </p:grpSpPr>
+      <p:sp>
+        <p:nvSpPr>
+          <p:cNvPr id="2" name="Text 0"/>
+          <p:cNvSpPr/>
+          <p:nvPr/>
+        </p:nvSpPr>
+        <p:spPr>
+          <a:xfrm>
+            <a:off x="457200" y="457200"/>
+            <a:ext cx="11216640" cy="0"/>
+          </a:xfrm>
+          <a:prstGeom prst="rect">
+            <a:avLst/>
+          </a:prstGeom>
+          <a:noFill/>
+          <a:ln/>
+        </p:spPr>
+        <p:txBody>
+          <a:bodyPr wrap="square" rtlCol="0" anchor="ctr"/>
+          <a:lstStyle/>
+          <a:p>
+            <a:pPr indent="0" marL="0">
+              <a:buNone/>
+            </a:pPr>
+            <a:r>
+              <a:rPr lang="en-US" sz="2600" b="1" dirty="0">
+                <a:solidFill>
+                  <a:srgbClr val="00FF99"/>
+                </a:solidFill>
+              </a:rPr>
+              <a:t>✅ Réponse : B</a:t>
+            </a:r>
+            <a:endParaRPr lang="en-US" sz="2600" dirty="0"/>
+          </a:p>
+        </p:txBody>
+      </p:sp>
+      <p:sp>
+        <p:nvSpPr>
+          <p:cNvPr id="3" name="Text 1"/>
+          <p:cNvSpPr/>
+          <p:nvPr/>
+        </p:nvSpPr>
+        <p:spPr>
+          <a:xfrm>
+            <a:off x="457200" y="1645920"/>
+            <a:ext cx="11216640" cy="0"/>
+          </a:xfrm>
+          <a:prstGeom prst="rect">
+            <a:avLst/>
+          </a:prstGeom>
+          <a:noFill/>
+          <a:ln/>
+        </p:spPr>
+        <p:txBody>
+          <a:bodyPr wrap="square" rtlCol="0" anchor="ctr"/>
+          <a:lstStyle/>
+          <a:p>
+            <a:pPr indent="0" marL="0">
+              <a:buNone/>
+            </a:pPr>
+            <a:r>
+              <a:rPr lang="en-US" sz="1600" dirty="0">
+                <a:solidFill>
+                  <a:srgbClr val="FFFFFF"/>
+                </a:solidFill>
+              </a:rPr>
+              <a:t>Le guide prévoit l'alimentation de Mon espace santé avec le PPA (chap. 1.8.2).</a:t>
+            </a:r>
+            <a:endParaRPr lang="en-US" sz="1600" dirty="0"/>
+          </a:p>
+        </p:txBody>
+      </p:sp>
+    </p:spTree>
+  </p:cSld>
+  <p:clrMapOvr>
+    <a:masterClrMapping/>
+  </p:clrMapOvr>
+</p:sld>
+</file>
+
+<file path=ppt/slides/slide189.xml><?xml version="1.0" encoding="utf-8"?>
+<p:sld xmlns:a="http://schemas.openxmlformats.org/drawingml/2006/main" xmlns:r="http://schemas.openxmlformats.org/officeDocument/2006/relationships" xmlns:p="http://schemas.openxmlformats.org/presentationml/2006/main">
+  <p:cSld name="Slide 189">
+    <p:bg>
+      <p:bgPr>
+        <a:solidFill>
+          <a:srgbClr val="1B3A6B"/>
+        </a:solidFill>
+      </p:bgPr>
+    </p:bg>
+    <p:spTree>
+      <p:nvGrpSpPr>
+        <p:cNvPr id="1" name=""/>
+        <p:cNvGrpSpPr/>
+        <p:nvPr/>
+      </p:nvGrpSpPr>
+      <p:grpSpPr>
+        <a:xfrm>
+          <a:off x="0" y="0"/>
+          <a:ext cx="0" cy="0"/>
+          <a:chOff x="0" y="0"/>
+          <a:chExt cx="0" cy="0"/>
+        </a:xfrm>
+      </p:grpSpPr>
+      <p:sp>
+        <p:nvSpPr>
+          <p:cNvPr id="2" name="Text 0"/>
+          <p:cNvSpPr/>
+          <p:nvPr/>
+        </p:nvSpPr>
+        <p:spPr>
+          <a:xfrm>
+            <a:off x="457200" y="365760"/>
+            <a:ext cx="11216640" cy="1280160"/>
+          </a:xfrm>
+          <a:prstGeom prst="rect">
+            <a:avLst/>
+          </a:prstGeom>
+          <a:noFill/>
+          <a:ln/>
+        </p:spPr>
+        <p:txBody>
+          <a:bodyPr wrap="square" rtlCol="0" anchor="ctr"/>
+          <a:lstStyle/>
+          <a:p>
+            <a:pPr indent="0" marL="0">
+              <a:buNone/>
+            </a:pPr>
+            <a:r>
+              <a:rPr lang="en-US" sz="2000" b="1" dirty="0">
+                <a:solidFill>
+                  <a:srgbClr val="FFFFFF"/>
+                </a:solidFill>
+              </a:rPr>
+              <a:t>Q95. Le guide vise à intégrer un PPA harmonisé dans :</a:t>
+            </a:r>
+            <a:endParaRPr lang="en-US" sz="2000" dirty="0"/>
+          </a:p>
+        </p:txBody>
+      </p:sp>
+      <p:sp>
+        <p:nvSpPr>
+          <p:cNvPr id="3" name="Text 1"/>
+          <p:cNvSpPr/>
+          <p:nvPr/>
+        </p:nvSpPr>
+        <p:spPr>
+          <a:xfrm>
+            <a:off x="640080" y="1920240"/>
+            <a:ext cx="10728960" cy="0"/>
+          </a:xfrm>
+          <a:prstGeom prst="rect">
+            <a:avLst/>
+          </a:prstGeom>
+          <a:noFill/>
+          <a:ln/>
+        </p:spPr>
+        <p:txBody>
+          <a:bodyPr wrap="square" rtlCol="0" anchor="ctr"/>
+          <a:lstStyle/>
+          <a:p>
+            <a:pPr indent="0" marL="0">
+              <a:buNone/>
+            </a:pPr>
+            <a:r>
+              <a:rPr lang="en-US" sz="1600" dirty="0">
+                <a:solidFill>
+                  <a:srgbClr val="FFFFFF"/>
+                </a:solidFill>
+              </a:rPr>
+              <a:t>A. Le RGPD</a:t>
+            </a:r>
+            <a:endParaRPr lang="en-US" sz="1600" dirty="0"/>
+          </a:p>
+        </p:txBody>
+      </p:sp>
+      <p:sp>
+        <p:nvSpPr>
+          <p:cNvPr id="4" name="Text 2"/>
+          <p:cNvSpPr/>
+          <p:nvPr/>
+        </p:nvSpPr>
+        <p:spPr>
+          <a:xfrm>
+            <a:off x="640080" y="2788920"/>
+            <a:ext cx="10728960" cy="0"/>
+          </a:xfrm>
+          <a:prstGeom prst="rect">
+            <a:avLst/>
+          </a:prstGeom>
+          <a:noFill/>
+          <a:ln/>
+        </p:spPr>
+        <p:txBody>
+          <a:bodyPr wrap="square" rtlCol="0" anchor="ctr"/>
+          <a:lstStyle/>
+          <a:p>
+            <a:pPr indent="0" marL="0">
+              <a:buNone/>
+            </a:pPr>
+            <a:r>
+              <a:rPr lang="en-US" sz="1600" dirty="0">
+                <a:solidFill>
+                  <a:srgbClr val="FFFFFF"/>
+                </a:solidFill>
+              </a:rPr>
+              <a:t>B. Le CI-SIS (cadre d'interopérabilité), avec l'Agence du numérique en santé</a:t>
+            </a:r>
+            <a:endParaRPr lang="en-US" sz="1600" dirty="0"/>
+          </a:p>
+        </p:txBody>
+      </p:sp>
+      <p:sp>
+        <p:nvSpPr>
+          <p:cNvPr id="5" name="Text 3"/>
+          <p:cNvSpPr/>
+          <p:nvPr/>
+        </p:nvSpPr>
+        <p:spPr>
+          <a:xfrm>
+            <a:off x="640080" y="3657600"/>
+            <a:ext cx="10728960" cy="0"/>
+          </a:xfrm>
+          <a:prstGeom prst="rect">
+            <a:avLst/>
+          </a:prstGeom>
+          <a:noFill/>
+          <a:ln/>
+        </p:spPr>
+        <p:txBody>
+          <a:bodyPr wrap="square" rtlCol="0" anchor="ctr"/>
+          <a:lstStyle/>
+          <a:p>
+            <a:pPr indent="0" marL="0">
+              <a:buNone/>
+            </a:pPr>
+            <a:r>
+              <a:rPr lang="en-US" sz="1600" dirty="0">
+                <a:solidFill>
+                  <a:srgbClr val="FFFFFF"/>
+                </a:solidFill>
+              </a:rPr>
+              <a:t>C. SERAFIN-PH</a:t>
+            </a:r>
+            <a:endParaRPr lang="en-US" sz="1600" dirty="0"/>
+          </a:p>
+        </p:txBody>
+      </p:sp>
+      <p:sp>
+        <p:nvSpPr>
+          <p:cNvPr id="6" name="Text 4"/>
+          <p:cNvSpPr/>
+          <p:nvPr/>
+        </p:nvSpPr>
+        <p:spPr>
+          <a:xfrm>
+            <a:off x="640080" y="4526280"/>
+            <a:ext cx="10728960" cy="0"/>
+          </a:xfrm>
+          <a:prstGeom prst="rect">
+            <a:avLst/>
+          </a:prstGeom>
+          <a:noFill/>
+          <a:ln/>
+        </p:spPr>
+        <p:txBody>
+          <a:bodyPr wrap="square" rtlCol="0" anchor="ctr"/>
+          <a:lstStyle/>
+          <a:p>
+            <a:pPr indent="0" marL="0">
+              <a:buNone/>
+            </a:pPr>
+            <a:r>
+              <a:rPr lang="en-US" sz="1600" dirty="0">
+                <a:solidFill>
+                  <a:srgbClr val="FFFFFF"/>
+                </a:solidFill>
+              </a:rPr>
+              <a:t>D. Le code du travail</a:t>
+            </a:r>
+            <a:endParaRPr lang="en-US" sz="1600" dirty="0"/>
+          </a:p>
+        </p:txBody>
+      </p:sp>
+    </p:spTree>
+  </p:cSld>
+  <p:clrMapOvr>
+    <a:masterClrMapping/>
+  </p:clrMapOvr>
+</p:sld>
+</file>
+
 <file path=ppt/slides/slide19.xml><?xml version="1.0" encoding="utf-8"?>
 <p:sld xmlns:a="http://schemas.openxmlformats.org/drawingml/2006/main" xmlns:r="http://schemas.openxmlformats.org/officeDocument/2006/relationships" xmlns:p="http://schemas.openxmlformats.org/presentationml/2006/main">
   <p:cSld name="Slide 19">
@@ -30811,6 +34561,1586 @@
                 </a:solidFill>
               </a:rPr>
               <a:t>D. Représentée seulement</a:t>
+            </a:r>
+            <a:endParaRPr lang="en-US" sz="1600" dirty="0"/>
+          </a:p>
+        </p:txBody>
+      </p:sp>
+    </p:spTree>
+  </p:cSld>
+  <p:clrMapOvr>
+    <a:masterClrMapping/>
+  </p:clrMapOvr>
+</p:sld>
+</file>
+
+<file path=ppt/slides/slide190.xml><?xml version="1.0" encoding="utf-8"?>
+<p:sld xmlns:a="http://schemas.openxmlformats.org/drawingml/2006/main" xmlns:r="http://schemas.openxmlformats.org/officeDocument/2006/relationships" xmlns:p="http://schemas.openxmlformats.org/presentationml/2006/main">
+  <p:cSld name="Slide 190">
+    <p:bg>
+      <p:bgPr>
+        <a:solidFill>
+          <a:srgbClr val="1B3A6B"/>
+        </a:solidFill>
+      </p:bgPr>
+    </p:bg>
+    <p:spTree>
+      <p:nvGrpSpPr>
+        <p:cNvPr id="1" name=""/>
+        <p:cNvGrpSpPr/>
+        <p:nvPr/>
+      </p:nvGrpSpPr>
+      <p:grpSpPr>
+        <a:xfrm>
+          <a:off x="0" y="0"/>
+          <a:ext cx="0" cy="0"/>
+          <a:chOff x="0" y="0"/>
+          <a:chExt cx="0" cy="0"/>
+        </a:xfrm>
+      </p:grpSpPr>
+      <p:sp>
+        <p:nvSpPr>
+          <p:cNvPr id="2" name="Text 0"/>
+          <p:cNvSpPr/>
+          <p:nvPr/>
+        </p:nvSpPr>
+        <p:spPr>
+          <a:xfrm>
+            <a:off x="457200" y="457200"/>
+            <a:ext cx="11216640" cy="0"/>
+          </a:xfrm>
+          <a:prstGeom prst="rect">
+            <a:avLst/>
+          </a:prstGeom>
+          <a:noFill/>
+          <a:ln/>
+        </p:spPr>
+        <p:txBody>
+          <a:bodyPr wrap="square" rtlCol="0" anchor="ctr"/>
+          <a:lstStyle/>
+          <a:p>
+            <a:pPr indent="0" marL="0">
+              <a:buNone/>
+            </a:pPr>
+            <a:r>
+              <a:rPr lang="en-US" sz="2600" b="1" dirty="0">
+                <a:solidFill>
+                  <a:srgbClr val="00FF99"/>
+                </a:solidFill>
+              </a:rPr>
+              <a:t>✅ Réponse : B</a:t>
+            </a:r>
+            <a:endParaRPr lang="en-US" sz="2600" dirty="0"/>
+          </a:p>
+        </p:txBody>
+      </p:sp>
+      <p:sp>
+        <p:nvSpPr>
+          <p:cNvPr id="3" name="Text 1"/>
+          <p:cNvSpPr/>
+          <p:nvPr/>
+        </p:nvSpPr>
+        <p:spPr>
+          <a:xfrm>
+            <a:off x="457200" y="1645920"/>
+            <a:ext cx="11216640" cy="0"/>
+          </a:xfrm>
+          <a:prstGeom prst="rect">
+            <a:avLst/>
+          </a:prstGeom>
+          <a:noFill/>
+          <a:ln/>
+        </p:spPr>
+        <p:txBody>
+          <a:bodyPr wrap="square" rtlCol="0" anchor="ctr"/>
+          <a:lstStyle/>
+          <a:p>
+            <a:pPr indent="0" marL="0">
+              <a:buNone/>
+            </a:pPr>
+            <a:r>
+              <a:rPr lang="en-US" sz="1600" dirty="0">
+                <a:solidFill>
+                  <a:srgbClr val="FFFFFF"/>
+                </a:solidFill>
+              </a:rPr>
+              <a:t>Objectif : intégration d'un PPA harmonisé dans le CI-SIS, avec l'ANS.</a:t>
+            </a:r>
+            <a:endParaRPr lang="en-US" sz="1600" dirty="0"/>
+          </a:p>
+        </p:txBody>
+      </p:sp>
+    </p:spTree>
+  </p:cSld>
+  <p:clrMapOvr>
+    <a:masterClrMapping/>
+  </p:clrMapOvr>
+</p:sld>
+</file>
+
+<file path=ppt/slides/slide191.xml><?xml version="1.0" encoding="utf-8"?>
+<p:sld xmlns:a="http://schemas.openxmlformats.org/drawingml/2006/main" xmlns:r="http://schemas.openxmlformats.org/officeDocument/2006/relationships" xmlns:p="http://schemas.openxmlformats.org/presentationml/2006/main">
+  <p:cSld name="Slide 191">
+    <p:bg>
+      <p:bgPr>
+        <a:solidFill>
+          <a:srgbClr val="1B3A6B"/>
+        </a:solidFill>
+      </p:bgPr>
+    </p:bg>
+    <p:spTree>
+      <p:nvGrpSpPr>
+        <p:cNvPr id="1" name=""/>
+        <p:cNvGrpSpPr/>
+        <p:nvPr/>
+      </p:nvGrpSpPr>
+      <p:grpSpPr>
+        <a:xfrm>
+          <a:off x="0" y="0"/>
+          <a:ext cx="0" cy="0"/>
+          <a:chOff x="0" y="0"/>
+          <a:chExt cx="0" cy="0"/>
+        </a:xfrm>
+      </p:grpSpPr>
+      <p:sp>
+        <p:nvSpPr>
+          <p:cNvPr id="2" name="Text 0"/>
+          <p:cNvSpPr/>
+          <p:nvPr/>
+        </p:nvSpPr>
+        <p:spPr>
+          <a:xfrm>
+            <a:off x="457200" y="365760"/>
+            <a:ext cx="11216640" cy="1280160"/>
+          </a:xfrm>
+          <a:prstGeom prst="rect">
+            <a:avLst/>
+          </a:prstGeom>
+          <a:noFill/>
+          <a:ln/>
+        </p:spPr>
+        <p:txBody>
+          <a:bodyPr wrap="square" rtlCol="0" anchor="ctr"/>
+          <a:lstStyle/>
+          <a:p>
+            <a:pPr indent="0" marL="0">
+              <a:buNone/>
+            </a:pPr>
+            <a:r>
+              <a:rPr lang="en-US" sz="2000" b="1" dirty="0">
+                <a:solidFill>
+                  <a:srgbClr val="FFFFFF"/>
+                </a:solidFill>
+              </a:rPr>
+              <a:t>Q96. Selon la loi 2002-2, le contrat de séjour/DIPC est rédigé dans un délai de :</a:t>
+            </a:r>
+            <a:endParaRPr lang="en-US" sz="2000" dirty="0"/>
+          </a:p>
+        </p:txBody>
+      </p:sp>
+      <p:sp>
+        <p:nvSpPr>
+          <p:cNvPr id="3" name="Text 1"/>
+          <p:cNvSpPr/>
+          <p:nvPr/>
+        </p:nvSpPr>
+        <p:spPr>
+          <a:xfrm>
+            <a:off x="640080" y="1920240"/>
+            <a:ext cx="10728960" cy="0"/>
+          </a:xfrm>
+          <a:prstGeom prst="rect">
+            <a:avLst/>
+          </a:prstGeom>
+          <a:noFill/>
+          <a:ln/>
+        </p:spPr>
+        <p:txBody>
+          <a:bodyPr wrap="square" rtlCol="0" anchor="ctr"/>
+          <a:lstStyle/>
+          <a:p>
+            <a:pPr indent="0" marL="0">
+              <a:buNone/>
+            </a:pPr>
+            <a:r>
+              <a:rPr lang="en-US" sz="1600" dirty="0">
+                <a:solidFill>
+                  <a:srgbClr val="FFFFFF"/>
+                </a:solidFill>
+              </a:rPr>
+              <a:t>A. 1 mois après l'admission</a:t>
+            </a:r>
+            <a:endParaRPr lang="en-US" sz="1600" dirty="0"/>
+          </a:p>
+        </p:txBody>
+      </p:sp>
+      <p:sp>
+        <p:nvSpPr>
+          <p:cNvPr id="4" name="Text 2"/>
+          <p:cNvSpPr/>
+          <p:nvPr/>
+        </p:nvSpPr>
+        <p:spPr>
+          <a:xfrm>
+            <a:off x="640080" y="2788920"/>
+            <a:ext cx="10728960" cy="0"/>
+          </a:xfrm>
+          <a:prstGeom prst="rect">
+            <a:avLst/>
+          </a:prstGeom>
+          <a:noFill/>
+          <a:ln/>
+        </p:spPr>
+        <p:txBody>
+          <a:bodyPr wrap="square" rtlCol="0" anchor="ctr"/>
+          <a:lstStyle/>
+          <a:p>
+            <a:pPr indent="0" marL="0">
+              <a:buNone/>
+            </a:pPr>
+            <a:r>
+              <a:rPr lang="en-US" sz="1600" dirty="0">
+                <a:solidFill>
+                  <a:srgbClr val="FFFFFF"/>
+                </a:solidFill>
+              </a:rPr>
+              <a:t>B. 1 an</a:t>
+            </a:r>
+            <a:endParaRPr lang="en-US" sz="1600" dirty="0"/>
+          </a:p>
+        </p:txBody>
+      </p:sp>
+      <p:sp>
+        <p:nvSpPr>
+          <p:cNvPr id="5" name="Text 3"/>
+          <p:cNvSpPr/>
+          <p:nvPr/>
+        </p:nvSpPr>
+        <p:spPr>
+          <a:xfrm>
+            <a:off x="640080" y="3657600"/>
+            <a:ext cx="10728960" cy="0"/>
+          </a:xfrm>
+          <a:prstGeom prst="rect">
+            <a:avLst/>
+          </a:prstGeom>
+          <a:noFill/>
+          <a:ln/>
+        </p:spPr>
+        <p:txBody>
+          <a:bodyPr wrap="square" rtlCol="0" anchor="ctr"/>
+          <a:lstStyle/>
+          <a:p>
+            <a:pPr indent="0" marL="0">
+              <a:buNone/>
+            </a:pPr>
+            <a:r>
+              <a:rPr lang="en-US" sz="1600" dirty="0">
+                <a:solidFill>
+                  <a:srgbClr val="FFFFFF"/>
+                </a:solidFill>
+              </a:rPr>
+              <a:t>C. 6 mois</a:t>
+            </a:r>
+            <a:endParaRPr lang="en-US" sz="1600" dirty="0"/>
+          </a:p>
+        </p:txBody>
+      </p:sp>
+      <p:sp>
+        <p:nvSpPr>
+          <p:cNvPr id="6" name="Text 4"/>
+          <p:cNvSpPr/>
+          <p:nvPr/>
+        </p:nvSpPr>
+        <p:spPr>
+          <a:xfrm>
+            <a:off x="640080" y="4526280"/>
+            <a:ext cx="10728960" cy="0"/>
+          </a:xfrm>
+          <a:prstGeom prst="rect">
+            <a:avLst/>
+          </a:prstGeom>
+          <a:noFill/>
+          <a:ln/>
+        </p:spPr>
+        <p:txBody>
+          <a:bodyPr wrap="square" rtlCol="0" anchor="ctr"/>
+          <a:lstStyle/>
+          <a:p>
+            <a:pPr indent="0" marL="0">
+              <a:buNone/>
+            </a:pPr>
+            <a:r>
+              <a:rPr lang="en-US" sz="1600" dirty="0">
+                <a:solidFill>
+                  <a:srgbClr val="FFFFFF"/>
+                </a:solidFill>
+              </a:rPr>
+              <a:t>D. 48 heures</a:t>
+            </a:r>
+            <a:endParaRPr lang="en-US" sz="1600" dirty="0"/>
+          </a:p>
+        </p:txBody>
+      </p:sp>
+    </p:spTree>
+  </p:cSld>
+  <p:clrMapOvr>
+    <a:masterClrMapping/>
+  </p:clrMapOvr>
+</p:sld>
+</file>
+
+<file path=ppt/slides/slide192.xml><?xml version="1.0" encoding="utf-8"?>
+<p:sld xmlns:a="http://schemas.openxmlformats.org/drawingml/2006/main" xmlns:r="http://schemas.openxmlformats.org/officeDocument/2006/relationships" xmlns:p="http://schemas.openxmlformats.org/presentationml/2006/main">
+  <p:cSld name="Slide 192">
+    <p:bg>
+      <p:bgPr>
+        <a:solidFill>
+          <a:srgbClr val="1B3A6B"/>
+        </a:solidFill>
+      </p:bgPr>
+    </p:bg>
+    <p:spTree>
+      <p:nvGrpSpPr>
+        <p:cNvPr id="1" name=""/>
+        <p:cNvGrpSpPr/>
+        <p:nvPr/>
+      </p:nvGrpSpPr>
+      <p:grpSpPr>
+        <a:xfrm>
+          <a:off x="0" y="0"/>
+          <a:ext cx="0" cy="0"/>
+          <a:chOff x="0" y="0"/>
+          <a:chExt cx="0" cy="0"/>
+        </a:xfrm>
+      </p:grpSpPr>
+      <p:sp>
+        <p:nvSpPr>
+          <p:cNvPr id="2" name="Text 0"/>
+          <p:cNvSpPr/>
+          <p:nvPr/>
+        </p:nvSpPr>
+        <p:spPr>
+          <a:xfrm>
+            <a:off x="457200" y="457200"/>
+            <a:ext cx="11216640" cy="0"/>
+          </a:xfrm>
+          <a:prstGeom prst="rect">
+            <a:avLst/>
+          </a:prstGeom>
+          <a:noFill/>
+          <a:ln/>
+        </p:spPr>
+        <p:txBody>
+          <a:bodyPr wrap="square" rtlCol="0" anchor="ctr"/>
+          <a:lstStyle/>
+          <a:p>
+            <a:pPr indent="0" marL="0">
+              <a:buNone/>
+            </a:pPr>
+            <a:r>
+              <a:rPr lang="en-US" sz="2600" b="1" dirty="0">
+                <a:solidFill>
+                  <a:srgbClr val="00FF99"/>
+                </a:solidFill>
+              </a:rPr>
+              <a:t>✅ Réponse : A</a:t>
+            </a:r>
+            <a:endParaRPr lang="en-US" sz="2600" dirty="0"/>
+          </a:p>
+        </p:txBody>
+      </p:sp>
+      <p:sp>
+        <p:nvSpPr>
+          <p:cNvPr id="3" name="Text 1"/>
+          <p:cNvSpPr/>
+          <p:nvPr/>
+        </p:nvSpPr>
+        <p:spPr>
+          <a:xfrm>
+            <a:off x="457200" y="1645920"/>
+            <a:ext cx="11216640" cy="0"/>
+          </a:xfrm>
+          <a:prstGeom prst="rect">
+            <a:avLst/>
+          </a:prstGeom>
+          <a:noFill/>
+          <a:ln/>
+        </p:spPr>
+        <p:txBody>
+          <a:bodyPr wrap="square" rtlCol="0" anchor="ctr"/>
+          <a:lstStyle/>
+          <a:p>
+            <a:pPr indent="0" marL="0">
+              <a:buNone/>
+            </a:pPr>
+            <a:r>
+              <a:rPr lang="en-US" sz="1600" dirty="0">
+                <a:solidFill>
+                  <a:srgbClr val="FFFFFF"/>
+                </a:solidFill>
+              </a:rPr>
+              <a:t>DIPC/contrat de séjour sous 1 mois après l'admission.</a:t>
+            </a:r>
+            <a:endParaRPr lang="en-US" sz="1600" dirty="0"/>
+          </a:p>
+        </p:txBody>
+      </p:sp>
+    </p:spTree>
+  </p:cSld>
+  <p:clrMapOvr>
+    <a:masterClrMapping/>
+  </p:clrMapOvr>
+</p:sld>
+</file>
+
+<file path=ppt/slides/slide193.xml><?xml version="1.0" encoding="utf-8"?>
+<p:sld xmlns:a="http://schemas.openxmlformats.org/drawingml/2006/main" xmlns:r="http://schemas.openxmlformats.org/officeDocument/2006/relationships" xmlns:p="http://schemas.openxmlformats.org/presentationml/2006/main">
+  <p:cSld name="Slide 193">
+    <p:bg>
+      <p:bgPr>
+        <a:solidFill>
+          <a:srgbClr val="1B3A6B"/>
+        </a:solidFill>
+      </p:bgPr>
+    </p:bg>
+    <p:spTree>
+      <p:nvGrpSpPr>
+        <p:cNvPr id="1" name=""/>
+        <p:cNvGrpSpPr/>
+        <p:nvPr/>
+      </p:nvGrpSpPr>
+      <p:grpSpPr>
+        <a:xfrm>
+          <a:off x="0" y="0"/>
+          <a:ext cx="0" cy="0"/>
+          <a:chOff x="0" y="0"/>
+          <a:chExt cx="0" cy="0"/>
+        </a:xfrm>
+      </p:grpSpPr>
+      <p:sp>
+        <p:nvSpPr>
+          <p:cNvPr id="2" name="Text 0"/>
+          <p:cNvSpPr/>
+          <p:nvPr/>
+        </p:nvSpPr>
+        <p:spPr>
+          <a:xfrm>
+            <a:off x="457200" y="365760"/>
+            <a:ext cx="11216640" cy="1280160"/>
+          </a:xfrm>
+          <a:prstGeom prst="rect">
+            <a:avLst/>
+          </a:prstGeom>
+          <a:noFill/>
+          <a:ln/>
+        </p:spPr>
+        <p:txBody>
+          <a:bodyPr wrap="square" rtlCol="0" anchor="ctr"/>
+          <a:lstStyle/>
+          <a:p>
+            <a:pPr indent="0" marL="0">
+              <a:buNone/>
+            </a:pPr>
+            <a:r>
+              <a:rPr lang="en-US" sz="2000" b="1" dirty="0">
+                <a:solidFill>
+                  <a:srgbClr val="FFFFFF"/>
+                </a:solidFill>
+              </a:rPr>
+              <a:t>Q97. L'avenant précisant objectifs et prestations doit être établi sous :</a:t>
+            </a:r>
+            <a:endParaRPr lang="en-US" sz="2000" dirty="0"/>
+          </a:p>
+        </p:txBody>
+      </p:sp>
+      <p:sp>
+        <p:nvSpPr>
+          <p:cNvPr id="3" name="Text 1"/>
+          <p:cNvSpPr/>
+          <p:nvPr/>
+        </p:nvSpPr>
+        <p:spPr>
+          <a:xfrm>
+            <a:off x="640080" y="1920240"/>
+            <a:ext cx="10728960" cy="0"/>
+          </a:xfrm>
+          <a:prstGeom prst="rect">
+            <a:avLst/>
+          </a:prstGeom>
+          <a:noFill/>
+          <a:ln/>
+        </p:spPr>
+        <p:txBody>
+          <a:bodyPr wrap="square" rtlCol="0" anchor="ctr"/>
+          <a:lstStyle/>
+          <a:p>
+            <a:pPr indent="0" marL="0">
+              <a:buNone/>
+            </a:pPr>
+            <a:r>
+              <a:rPr lang="en-US" sz="1600" dirty="0">
+                <a:solidFill>
+                  <a:srgbClr val="FFFFFF"/>
+                </a:solidFill>
+              </a:rPr>
+              <a:t>A. 6 mois, puis mis à jour chaque année</a:t>
+            </a:r>
+            <a:endParaRPr lang="en-US" sz="1600" dirty="0"/>
+          </a:p>
+        </p:txBody>
+      </p:sp>
+      <p:sp>
+        <p:nvSpPr>
+          <p:cNvPr id="4" name="Text 2"/>
+          <p:cNvSpPr/>
+          <p:nvPr/>
+        </p:nvSpPr>
+        <p:spPr>
+          <a:xfrm>
+            <a:off x="640080" y="2788920"/>
+            <a:ext cx="10728960" cy="0"/>
+          </a:xfrm>
+          <a:prstGeom prst="rect">
+            <a:avLst/>
+          </a:prstGeom>
+          <a:noFill/>
+          <a:ln/>
+        </p:spPr>
+        <p:txBody>
+          <a:bodyPr wrap="square" rtlCol="0" anchor="ctr"/>
+          <a:lstStyle/>
+          <a:p>
+            <a:pPr indent="0" marL="0">
+              <a:buNone/>
+            </a:pPr>
+            <a:r>
+              <a:rPr lang="en-US" sz="1600" dirty="0">
+                <a:solidFill>
+                  <a:srgbClr val="FFFFFF"/>
+                </a:solidFill>
+              </a:rPr>
+              <a:t>B. 24 mois</a:t>
+            </a:r>
+            <a:endParaRPr lang="en-US" sz="1600" dirty="0"/>
+          </a:p>
+        </p:txBody>
+      </p:sp>
+      <p:sp>
+        <p:nvSpPr>
+          <p:cNvPr id="5" name="Text 3"/>
+          <p:cNvSpPr/>
+          <p:nvPr/>
+        </p:nvSpPr>
+        <p:spPr>
+          <a:xfrm>
+            <a:off x="640080" y="3657600"/>
+            <a:ext cx="10728960" cy="0"/>
+          </a:xfrm>
+          <a:prstGeom prst="rect">
+            <a:avLst/>
+          </a:prstGeom>
+          <a:noFill/>
+          <a:ln/>
+        </p:spPr>
+        <p:txBody>
+          <a:bodyPr wrap="square" rtlCol="0" anchor="ctr"/>
+          <a:lstStyle/>
+          <a:p>
+            <a:pPr indent="0" marL="0">
+              <a:buNone/>
+            </a:pPr>
+            <a:r>
+              <a:rPr lang="en-US" sz="1600" dirty="0">
+                <a:solidFill>
+                  <a:srgbClr val="FFFFFF"/>
+                </a:solidFill>
+              </a:rPr>
+              <a:t>C. 1 semaine</a:t>
+            </a:r>
+            <a:endParaRPr lang="en-US" sz="1600" dirty="0"/>
+          </a:p>
+        </p:txBody>
+      </p:sp>
+      <p:sp>
+        <p:nvSpPr>
+          <p:cNvPr id="6" name="Text 4"/>
+          <p:cNvSpPr/>
+          <p:nvPr/>
+        </p:nvSpPr>
+        <p:spPr>
+          <a:xfrm>
+            <a:off x="640080" y="4526280"/>
+            <a:ext cx="10728960" cy="0"/>
+          </a:xfrm>
+          <a:prstGeom prst="rect">
+            <a:avLst/>
+          </a:prstGeom>
+          <a:noFill/>
+          <a:ln/>
+        </p:spPr>
+        <p:txBody>
+          <a:bodyPr wrap="square" rtlCol="0" anchor="ctr"/>
+          <a:lstStyle/>
+          <a:p>
+            <a:pPr indent="0" marL="0">
+              <a:buNone/>
+            </a:pPr>
+            <a:r>
+              <a:rPr lang="en-US" sz="1600" dirty="0">
+                <a:solidFill>
+                  <a:srgbClr val="FFFFFF"/>
+                </a:solidFill>
+              </a:rPr>
+              <a:t>D. Jamais</a:t>
+            </a:r>
+            <a:endParaRPr lang="en-US" sz="1600" dirty="0"/>
+          </a:p>
+        </p:txBody>
+      </p:sp>
+    </p:spTree>
+  </p:cSld>
+  <p:clrMapOvr>
+    <a:masterClrMapping/>
+  </p:clrMapOvr>
+</p:sld>
+</file>
+
+<file path=ppt/slides/slide194.xml><?xml version="1.0" encoding="utf-8"?>
+<p:sld xmlns:a="http://schemas.openxmlformats.org/drawingml/2006/main" xmlns:r="http://schemas.openxmlformats.org/officeDocument/2006/relationships" xmlns:p="http://schemas.openxmlformats.org/presentationml/2006/main">
+  <p:cSld name="Slide 194">
+    <p:bg>
+      <p:bgPr>
+        <a:solidFill>
+          <a:srgbClr val="1B3A6B"/>
+        </a:solidFill>
+      </p:bgPr>
+    </p:bg>
+    <p:spTree>
+      <p:nvGrpSpPr>
+        <p:cNvPr id="1" name=""/>
+        <p:cNvGrpSpPr/>
+        <p:nvPr/>
+      </p:nvGrpSpPr>
+      <p:grpSpPr>
+        <a:xfrm>
+          <a:off x="0" y="0"/>
+          <a:ext cx="0" cy="0"/>
+          <a:chOff x="0" y="0"/>
+          <a:chExt cx="0" cy="0"/>
+        </a:xfrm>
+      </p:grpSpPr>
+      <p:sp>
+        <p:nvSpPr>
+          <p:cNvPr id="2" name="Text 0"/>
+          <p:cNvSpPr/>
+          <p:nvPr/>
+        </p:nvSpPr>
+        <p:spPr>
+          <a:xfrm>
+            <a:off x="457200" y="457200"/>
+            <a:ext cx="11216640" cy="0"/>
+          </a:xfrm>
+          <a:prstGeom prst="rect">
+            <a:avLst/>
+          </a:prstGeom>
+          <a:noFill/>
+          <a:ln/>
+        </p:spPr>
+        <p:txBody>
+          <a:bodyPr wrap="square" rtlCol="0" anchor="ctr"/>
+          <a:lstStyle/>
+          <a:p>
+            <a:pPr indent="0" marL="0">
+              <a:buNone/>
+            </a:pPr>
+            <a:r>
+              <a:rPr lang="en-US" sz="2600" b="1" dirty="0">
+                <a:solidFill>
+                  <a:srgbClr val="00FF99"/>
+                </a:solidFill>
+              </a:rPr>
+              <a:t>✅ Réponse : A</a:t>
+            </a:r>
+            <a:endParaRPr lang="en-US" sz="2600" dirty="0"/>
+          </a:p>
+        </p:txBody>
+      </p:sp>
+      <p:sp>
+        <p:nvSpPr>
+          <p:cNvPr id="3" name="Text 1"/>
+          <p:cNvSpPr/>
+          <p:nvPr/>
+        </p:nvSpPr>
+        <p:spPr>
+          <a:xfrm>
+            <a:off x="457200" y="1645920"/>
+            <a:ext cx="11216640" cy="0"/>
+          </a:xfrm>
+          <a:prstGeom prst="rect">
+            <a:avLst/>
+          </a:prstGeom>
+          <a:noFill/>
+          <a:ln/>
+        </p:spPr>
+        <p:txBody>
+          <a:bodyPr wrap="square" rtlCol="0" anchor="ctr"/>
+          <a:lstStyle/>
+          <a:p>
+            <a:pPr indent="0" marL="0">
+              <a:buNone/>
+            </a:pPr>
+            <a:r>
+              <a:rPr lang="en-US" sz="1600" dirty="0">
+                <a:solidFill>
+                  <a:srgbClr val="FFFFFF"/>
+                </a:solidFill>
+              </a:rPr>
+              <a:t>Avenant sous 6 mois max, mis à jour annuellement (art. D.311 CASF).</a:t>
+            </a:r>
+            <a:endParaRPr lang="en-US" sz="1600" dirty="0"/>
+          </a:p>
+        </p:txBody>
+      </p:sp>
+    </p:spTree>
+  </p:cSld>
+  <p:clrMapOvr>
+    <a:masterClrMapping/>
+  </p:clrMapOvr>
+</p:sld>
+</file>
+
+<file path=ppt/slides/slide195.xml><?xml version="1.0" encoding="utf-8"?>
+<p:sld xmlns:a="http://schemas.openxmlformats.org/drawingml/2006/main" xmlns:r="http://schemas.openxmlformats.org/officeDocument/2006/relationships" xmlns:p="http://schemas.openxmlformats.org/presentationml/2006/main">
+  <p:cSld name="Slide 195">
+    <p:bg>
+      <p:bgPr>
+        <a:solidFill>
+          <a:srgbClr val="1B3A6B"/>
+        </a:solidFill>
+      </p:bgPr>
+    </p:bg>
+    <p:spTree>
+      <p:nvGrpSpPr>
+        <p:cNvPr id="1" name=""/>
+        <p:cNvGrpSpPr/>
+        <p:nvPr/>
+      </p:nvGrpSpPr>
+      <p:grpSpPr>
+        <a:xfrm>
+          <a:off x="0" y="0"/>
+          <a:ext cx="0" cy="0"/>
+          <a:chOff x="0" y="0"/>
+          <a:chExt cx="0" cy="0"/>
+        </a:xfrm>
+      </p:grpSpPr>
+      <p:sp>
+        <p:nvSpPr>
+          <p:cNvPr id="2" name="Text 0"/>
+          <p:cNvSpPr/>
+          <p:nvPr/>
+        </p:nvSpPr>
+        <p:spPr>
+          <a:xfrm>
+            <a:off x="457200" y="365760"/>
+            <a:ext cx="11216640" cy="1280160"/>
+          </a:xfrm>
+          <a:prstGeom prst="rect">
+            <a:avLst/>
+          </a:prstGeom>
+          <a:noFill/>
+          <a:ln/>
+        </p:spPr>
+        <p:txBody>
+          <a:bodyPr wrap="square" rtlCol="0" anchor="ctr"/>
+          <a:lstStyle/>
+          <a:p>
+            <a:pPr indent="0" marL="0">
+              <a:buNone/>
+            </a:pPr>
+            <a:r>
+              <a:rPr lang="en-US" sz="2000" b="1" dirty="0">
+                <a:solidFill>
+                  <a:srgbClr val="FFFFFF"/>
+                </a:solidFill>
+              </a:rPr>
+              <a:t>Q98. Le terme « projet personnalisé » a été proposé par la HAS en :</a:t>
+            </a:r>
+            <a:endParaRPr lang="en-US" sz="2000" dirty="0"/>
+          </a:p>
+        </p:txBody>
+      </p:sp>
+      <p:sp>
+        <p:nvSpPr>
+          <p:cNvPr id="3" name="Text 1"/>
+          <p:cNvSpPr/>
+          <p:nvPr/>
+        </p:nvSpPr>
+        <p:spPr>
+          <a:xfrm>
+            <a:off x="640080" y="1920240"/>
+            <a:ext cx="10728960" cy="0"/>
+          </a:xfrm>
+          <a:prstGeom prst="rect">
+            <a:avLst/>
+          </a:prstGeom>
+          <a:noFill/>
+          <a:ln/>
+        </p:spPr>
+        <p:txBody>
+          <a:bodyPr wrap="square" rtlCol="0" anchor="ctr"/>
+          <a:lstStyle/>
+          <a:p>
+            <a:pPr indent="0" marL="0">
+              <a:buNone/>
+            </a:pPr>
+            <a:r>
+              <a:rPr lang="en-US" sz="1600" dirty="0">
+                <a:solidFill>
+                  <a:srgbClr val="FFFFFF"/>
+                </a:solidFill>
+              </a:rPr>
+              <a:t>A. 2008</a:t>
+            </a:r>
+            <a:endParaRPr lang="en-US" sz="1600" dirty="0"/>
+          </a:p>
+        </p:txBody>
+      </p:sp>
+      <p:sp>
+        <p:nvSpPr>
+          <p:cNvPr id="4" name="Text 2"/>
+          <p:cNvSpPr/>
+          <p:nvPr/>
+        </p:nvSpPr>
+        <p:spPr>
+          <a:xfrm>
+            <a:off x="640080" y="2788920"/>
+            <a:ext cx="10728960" cy="0"/>
+          </a:xfrm>
+          <a:prstGeom prst="rect">
+            <a:avLst/>
+          </a:prstGeom>
+          <a:noFill/>
+          <a:ln/>
+        </p:spPr>
+        <p:txBody>
+          <a:bodyPr wrap="square" rtlCol="0" anchor="ctr"/>
+          <a:lstStyle/>
+          <a:p>
+            <a:pPr indent="0" marL="0">
+              <a:buNone/>
+            </a:pPr>
+            <a:r>
+              <a:rPr lang="en-US" sz="1600" dirty="0">
+                <a:solidFill>
+                  <a:srgbClr val="FFFFFF"/>
+                </a:solidFill>
+              </a:rPr>
+              <a:t>B. 2002</a:t>
+            </a:r>
+            <a:endParaRPr lang="en-US" sz="1600" dirty="0"/>
+          </a:p>
+        </p:txBody>
+      </p:sp>
+      <p:sp>
+        <p:nvSpPr>
+          <p:cNvPr id="5" name="Text 3"/>
+          <p:cNvSpPr/>
+          <p:nvPr/>
+        </p:nvSpPr>
+        <p:spPr>
+          <a:xfrm>
+            <a:off x="640080" y="3657600"/>
+            <a:ext cx="10728960" cy="0"/>
+          </a:xfrm>
+          <a:prstGeom prst="rect">
+            <a:avLst/>
+          </a:prstGeom>
+          <a:noFill/>
+          <a:ln/>
+        </p:spPr>
+        <p:txBody>
+          <a:bodyPr wrap="square" rtlCol="0" anchor="ctr"/>
+          <a:lstStyle/>
+          <a:p>
+            <a:pPr indent="0" marL="0">
+              <a:buNone/>
+            </a:pPr>
+            <a:r>
+              <a:rPr lang="en-US" sz="1600" dirty="0">
+                <a:solidFill>
+                  <a:srgbClr val="FFFFFF"/>
+                </a:solidFill>
+              </a:rPr>
+              <a:t>C. 2016</a:t>
+            </a:r>
+            <a:endParaRPr lang="en-US" sz="1600" dirty="0"/>
+          </a:p>
+        </p:txBody>
+      </p:sp>
+      <p:sp>
+        <p:nvSpPr>
+          <p:cNvPr id="6" name="Text 4"/>
+          <p:cNvSpPr/>
+          <p:nvPr/>
+        </p:nvSpPr>
+        <p:spPr>
+          <a:xfrm>
+            <a:off x="640080" y="4526280"/>
+            <a:ext cx="10728960" cy="0"/>
+          </a:xfrm>
+          <a:prstGeom prst="rect">
+            <a:avLst/>
+          </a:prstGeom>
+          <a:noFill/>
+          <a:ln/>
+        </p:spPr>
+        <p:txBody>
+          <a:bodyPr wrap="square" rtlCol="0" anchor="ctr"/>
+          <a:lstStyle/>
+          <a:p>
+            <a:pPr indent="0" marL="0">
+              <a:buNone/>
+            </a:pPr>
+            <a:r>
+              <a:rPr lang="en-US" sz="1600" dirty="0">
+                <a:solidFill>
+                  <a:srgbClr val="FFFFFF"/>
+                </a:solidFill>
+              </a:rPr>
+              <a:t>D. 2022</a:t>
+            </a:r>
+            <a:endParaRPr lang="en-US" sz="1600" dirty="0"/>
+          </a:p>
+        </p:txBody>
+      </p:sp>
+    </p:spTree>
+  </p:cSld>
+  <p:clrMapOvr>
+    <a:masterClrMapping/>
+  </p:clrMapOvr>
+</p:sld>
+</file>
+
+<file path=ppt/slides/slide196.xml><?xml version="1.0" encoding="utf-8"?>
+<p:sld xmlns:a="http://schemas.openxmlformats.org/drawingml/2006/main" xmlns:r="http://schemas.openxmlformats.org/officeDocument/2006/relationships" xmlns:p="http://schemas.openxmlformats.org/presentationml/2006/main">
+  <p:cSld name="Slide 196">
+    <p:bg>
+      <p:bgPr>
+        <a:solidFill>
+          <a:srgbClr val="1B3A6B"/>
+        </a:solidFill>
+      </p:bgPr>
+    </p:bg>
+    <p:spTree>
+      <p:nvGrpSpPr>
+        <p:cNvPr id="1" name=""/>
+        <p:cNvGrpSpPr/>
+        <p:nvPr/>
+      </p:nvGrpSpPr>
+      <p:grpSpPr>
+        <a:xfrm>
+          <a:off x="0" y="0"/>
+          <a:ext cx="0" cy="0"/>
+          <a:chOff x="0" y="0"/>
+          <a:chExt cx="0" cy="0"/>
+        </a:xfrm>
+      </p:grpSpPr>
+      <p:sp>
+        <p:nvSpPr>
+          <p:cNvPr id="2" name="Text 0"/>
+          <p:cNvSpPr/>
+          <p:nvPr/>
+        </p:nvSpPr>
+        <p:spPr>
+          <a:xfrm>
+            <a:off x="457200" y="457200"/>
+            <a:ext cx="11216640" cy="0"/>
+          </a:xfrm>
+          <a:prstGeom prst="rect">
+            <a:avLst/>
+          </a:prstGeom>
+          <a:noFill/>
+          <a:ln/>
+        </p:spPr>
+        <p:txBody>
+          <a:bodyPr wrap="square" rtlCol="0" anchor="ctr"/>
+          <a:lstStyle/>
+          <a:p>
+            <a:pPr indent="0" marL="0">
+              <a:buNone/>
+            </a:pPr>
+            <a:r>
+              <a:rPr lang="en-US" sz="2600" b="1" dirty="0">
+                <a:solidFill>
+                  <a:srgbClr val="00FF99"/>
+                </a:solidFill>
+              </a:rPr>
+              <a:t>✅ Réponse : A</a:t>
+            </a:r>
+            <a:endParaRPr lang="en-US" sz="2600" dirty="0"/>
+          </a:p>
+        </p:txBody>
+      </p:sp>
+      <p:sp>
+        <p:nvSpPr>
+          <p:cNvPr id="3" name="Text 1"/>
+          <p:cNvSpPr/>
+          <p:nvPr/>
+        </p:nvSpPr>
+        <p:spPr>
+          <a:xfrm>
+            <a:off x="457200" y="1645920"/>
+            <a:ext cx="11216640" cy="0"/>
+          </a:xfrm>
+          <a:prstGeom prst="rect">
+            <a:avLst/>
+          </a:prstGeom>
+          <a:noFill/>
+          <a:ln/>
+        </p:spPr>
+        <p:txBody>
+          <a:bodyPr wrap="square" rtlCol="0" anchor="ctr"/>
+          <a:lstStyle/>
+          <a:p>
+            <a:pPr indent="0" marL="0">
+              <a:buNone/>
+            </a:pPr>
+            <a:r>
+              <a:rPr lang="en-US" sz="1600" dirty="0">
+                <a:solidFill>
+                  <a:srgbClr val="FFFFFF"/>
+                </a:solidFill>
+              </a:rPr>
+              <a:t>La HAS a proposé le terme « projet personnalisé » en 2008.</a:t>
+            </a:r>
+            <a:endParaRPr lang="en-US" sz="1600" dirty="0"/>
+          </a:p>
+        </p:txBody>
+      </p:sp>
+    </p:spTree>
+  </p:cSld>
+  <p:clrMapOvr>
+    <a:masterClrMapping/>
+  </p:clrMapOvr>
+</p:sld>
+</file>
+
+<file path=ppt/slides/slide197.xml><?xml version="1.0" encoding="utf-8"?>
+<p:sld xmlns:a="http://schemas.openxmlformats.org/drawingml/2006/main" xmlns:r="http://schemas.openxmlformats.org/officeDocument/2006/relationships" xmlns:p="http://schemas.openxmlformats.org/presentationml/2006/main">
+  <p:cSld name="Slide 197">
+    <p:bg>
+      <p:bgPr>
+        <a:solidFill>
+          <a:srgbClr val="1B3A6B"/>
+        </a:solidFill>
+      </p:bgPr>
+    </p:bg>
+    <p:spTree>
+      <p:nvGrpSpPr>
+        <p:cNvPr id="1" name=""/>
+        <p:cNvGrpSpPr/>
+        <p:nvPr/>
+      </p:nvGrpSpPr>
+      <p:grpSpPr>
+        <a:xfrm>
+          <a:off x="0" y="0"/>
+          <a:ext cx="0" cy="0"/>
+          <a:chOff x="0" y="0"/>
+          <a:chExt cx="0" cy="0"/>
+        </a:xfrm>
+      </p:grpSpPr>
+      <p:sp>
+        <p:nvSpPr>
+          <p:cNvPr id="2" name="Text 0"/>
+          <p:cNvSpPr/>
+          <p:nvPr/>
+        </p:nvSpPr>
+        <p:spPr>
+          <a:xfrm>
+            <a:off x="457200" y="365760"/>
+            <a:ext cx="11216640" cy="1280160"/>
+          </a:xfrm>
+          <a:prstGeom prst="rect">
+            <a:avLst/>
+          </a:prstGeom>
+          <a:noFill/>
+          <a:ln/>
+        </p:spPr>
+        <p:txBody>
+          <a:bodyPr wrap="square" rtlCol="0" anchor="ctr"/>
+          <a:lstStyle/>
+          <a:p>
+            <a:pPr indent="0" marL="0">
+              <a:buNone/>
+            </a:pPr>
+            <a:r>
+              <a:rPr lang="en-US" sz="2000" b="1" dirty="0">
+                <a:solidFill>
+                  <a:srgbClr val="FFFFFF"/>
+                </a:solidFill>
+              </a:rPr>
+              <a:t>Q99. Le partage d'informations s'inscrit dans le cadre de :</a:t>
+            </a:r>
+            <a:endParaRPr lang="en-US" sz="2000" dirty="0"/>
+          </a:p>
+        </p:txBody>
+      </p:sp>
+      <p:sp>
+        <p:nvSpPr>
+          <p:cNvPr id="3" name="Text 1"/>
+          <p:cNvSpPr/>
+          <p:nvPr/>
+        </p:nvSpPr>
+        <p:spPr>
+          <a:xfrm>
+            <a:off x="640080" y="1920240"/>
+            <a:ext cx="10728960" cy="0"/>
+          </a:xfrm>
+          <a:prstGeom prst="rect">
+            <a:avLst/>
+          </a:prstGeom>
+          <a:noFill/>
+          <a:ln/>
+        </p:spPr>
+        <p:txBody>
+          <a:bodyPr wrap="square" rtlCol="0" anchor="ctr"/>
+          <a:lstStyle/>
+          <a:p>
+            <a:pPr indent="0" marL="0">
+              <a:buNone/>
+            </a:pPr>
+            <a:r>
+              <a:rPr lang="en-US" sz="1600" dirty="0">
+                <a:solidFill>
+                  <a:srgbClr val="FFFFFF"/>
+                </a:solidFill>
+              </a:rPr>
+              <a:t>A. La presse</a:t>
+            </a:r>
+            <a:endParaRPr lang="en-US" sz="1600" dirty="0"/>
+          </a:p>
+        </p:txBody>
+      </p:sp>
+      <p:sp>
+        <p:nvSpPr>
+          <p:cNvPr id="4" name="Text 2"/>
+          <p:cNvSpPr/>
+          <p:nvPr/>
+        </p:nvSpPr>
+        <p:spPr>
+          <a:xfrm>
+            <a:off x="640080" y="2788920"/>
+            <a:ext cx="10728960" cy="0"/>
+          </a:xfrm>
+          <a:prstGeom prst="rect">
+            <a:avLst/>
+          </a:prstGeom>
+          <a:noFill/>
+          <a:ln/>
+        </p:spPr>
+        <p:txBody>
+          <a:bodyPr wrap="square" rtlCol="0" anchor="ctr"/>
+          <a:lstStyle/>
+          <a:p>
+            <a:pPr indent="0" marL="0">
+              <a:buNone/>
+            </a:pPr>
+            <a:r>
+              <a:rPr lang="en-US" sz="1600" dirty="0">
+                <a:solidFill>
+                  <a:srgbClr val="FFFFFF"/>
+                </a:solidFill>
+              </a:rPr>
+              <a:t>B. L'équipe de soins (art. L.1110-12 CSP)</a:t>
+            </a:r>
+            <a:endParaRPr lang="en-US" sz="1600" dirty="0"/>
+          </a:p>
+        </p:txBody>
+      </p:sp>
+      <p:sp>
+        <p:nvSpPr>
+          <p:cNvPr id="5" name="Text 3"/>
+          <p:cNvSpPr/>
+          <p:nvPr/>
+        </p:nvSpPr>
+        <p:spPr>
+          <a:xfrm>
+            <a:off x="640080" y="3657600"/>
+            <a:ext cx="10728960" cy="0"/>
+          </a:xfrm>
+          <a:prstGeom prst="rect">
+            <a:avLst/>
+          </a:prstGeom>
+          <a:noFill/>
+          <a:ln/>
+        </p:spPr>
+        <p:txBody>
+          <a:bodyPr wrap="square" rtlCol="0" anchor="ctr"/>
+          <a:lstStyle/>
+          <a:p>
+            <a:pPr indent="0" marL="0">
+              <a:buNone/>
+            </a:pPr>
+            <a:r>
+              <a:rPr lang="en-US" sz="1600" dirty="0">
+                <a:solidFill>
+                  <a:srgbClr val="FFFFFF"/>
+                </a:solidFill>
+              </a:rPr>
+              <a:t>C. Aucun cadre</a:t>
+            </a:r>
+            <a:endParaRPr lang="en-US" sz="1600" dirty="0"/>
+          </a:p>
+        </p:txBody>
+      </p:sp>
+      <p:sp>
+        <p:nvSpPr>
+          <p:cNvPr id="6" name="Text 4"/>
+          <p:cNvSpPr/>
+          <p:nvPr/>
+        </p:nvSpPr>
+        <p:spPr>
+          <a:xfrm>
+            <a:off x="640080" y="4526280"/>
+            <a:ext cx="10728960" cy="0"/>
+          </a:xfrm>
+          <a:prstGeom prst="rect">
+            <a:avLst/>
+          </a:prstGeom>
+          <a:noFill/>
+          <a:ln/>
+        </p:spPr>
+        <p:txBody>
+          <a:bodyPr wrap="square" rtlCol="0" anchor="ctr"/>
+          <a:lstStyle/>
+          <a:p>
+            <a:pPr indent="0" marL="0">
+              <a:buNone/>
+            </a:pPr>
+            <a:r>
+              <a:rPr lang="en-US" sz="1600" dirty="0">
+                <a:solidFill>
+                  <a:srgbClr val="FFFFFF"/>
+                </a:solidFill>
+              </a:rPr>
+              <a:t>D. La famille élargie</a:t>
+            </a:r>
+            <a:endParaRPr lang="en-US" sz="1600" dirty="0"/>
+          </a:p>
+        </p:txBody>
+      </p:sp>
+    </p:spTree>
+  </p:cSld>
+  <p:clrMapOvr>
+    <a:masterClrMapping/>
+  </p:clrMapOvr>
+</p:sld>
+</file>
+
+<file path=ppt/slides/slide198.xml><?xml version="1.0" encoding="utf-8"?>
+<p:sld xmlns:a="http://schemas.openxmlformats.org/drawingml/2006/main" xmlns:r="http://schemas.openxmlformats.org/officeDocument/2006/relationships" xmlns:p="http://schemas.openxmlformats.org/presentationml/2006/main">
+  <p:cSld name="Slide 198">
+    <p:bg>
+      <p:bgPr>
+        <a:solidFill>
+          <a:srgbClr val="1B3A6B"/>
+        </a:solidFill>
+      </p:bgPr>
+    </p:bg>
+    <p:spTree>
+      <p:nvGrpSpPr>
+        <p:cNvPr id="1" name=""/>
+        <p:cNvGrpSpPr/>
+        <p:nvPr/>
+      </p:nvGrpSpPr>
+      <p:grpSpPr>
+        <a:xfrm>
+          <a:off x="0" y="0"/>
+          <a:ext cx="0" cy="0"/>
+          <a:chOff x="0" y="0"/>
+          <a:chExt cx="0" cy="0"/>
+        </a:xfrm>
+      </p:grpSpPr>
+      <p:sp>
+        <p:nvSpPr>
+          <p:cNvPr id="2" name="Text 0"/>
+          <p:cNvSpPr/>
+          <p:nvPr/>
+        </p:nvSpPr>
+        <p:spPr>
+          <a:xfrm>
+            <a:off x="457200" y="457200"/>
+            <a:ext cx="11216640" cy="0"/>
+          </a:xfrm>
+          <a:prstGeom prst="rect">
+            <a:avLst/>
+          </a:prstGeom>
+          <a:noFill/>
+          <a:ln/>
+        </p:spPr>
+        <p:txBody>
+          <a:bodyPr wrap="square" rtlCol="0" anchor="ctr"/>
+          <a:lstStyle/>
+          <a:p>
+            <a:pPr indent="0" marL="0">
+              <a:buNone/>
+            </a:pPr>
+            <a:r>
+              <a:rPr lang="en-US" sz="2600" b="1" dirty="0">
+                <a:solidFill>
+                  <a:srgbClr val="00FF99"/>
+                </a:solidFill>
+              </a:rPr>
+              <a:t>✅ Réponse : B</a:t>
+            </a:r>
+            <a:endParaRPr lang="en-US" sz="2600" dirty="0"/>
+          </a:p>
+        </p:txBody>
+      </p:sp>
+      <p:sp>
+        <p:nvSpPr>
+          <p:cNvPr id="3" name="Text 1"/>
+          <p:cNvSpPr/>
+          <p:nvPr/>
+        </p:nvSpPr>
+        <p:spPr>
+          <a:xfrm>
+            <a:off x="457200" y="1645920"/>
+            <a:ext cx="11216640" cy="0"/>
+          </a:xfrm>
+          <a:prstGeom prst="rect">
+            <a:avLst/>
+          </a:prstGeom>
+          <a:noFill/>
+          <a:ln/>
+        </p:spPr>
+        <p:txBody>
+          <a:bodyPr wrap="square" rtlCol="0" anchor="ctr"/>
+          <a:lstStyle/>
+          <a:p>
+            <a:pPr indent="0" marL="0">
+              <a:buNone/>
+            </a:pPr>
+            <a:r>
+              <a:rPr lang="en-US" sz="1600" dirty="0">
+                <a:solidFill>
+                  <a:srgbClr val="FFFFFF"/>
+                </a:solidFill>
+              </a:rPr>
+              <a:t>Cadre de l'« équipe de soins » défini à l'article L.1110-12 du CSP.</a:t>
+            </a:r>
+            <a:endParaRPr lang="en-US" sz="1600" dirty="0"/>
+          </a:p>
+        </p:txBody>
+      </p:sp>
+    </p:spTree>
+  </p:cSld>
+  <p:clrMapOvr>
+    <a:masterClrMapping/>
+  </p:clrMapOvr>
+</p:sld>
+</file>
+
+<file path=ppt/slides/slide199.xml><?xml version="1.0" encoding="utf-8"?>
+<p:sld xmlns:a="http://schemas.openxmlformats.org/drawingml/2006/main" xmlns:r="http://schemas.openxmlformats.org/officeDocument/2006/relationships" xmlns:p="http://schemas.openxmlformats.org/presentationml/2006/main">
+  <p:cSld name="Slide 199">
+    <p:bg>
+      <p:bgPr>
+        <a:solidFill>
+          <a:srgbClr val="1B3A6B"/>
+        </a:solidFill>
+      </p:bgPr>
+    </p:bg>
+    <p:spTree>
+      <p:nvGrpSpPr>
+        <p:cNvPr id="1" name=""/>
+        <p:cNvGrpSpPr/>
+        <p:nvPr/>
+      </p:nvGrpSpPr>
+      <p:grpSpPr>
+        <a:xfrm>
+          <a:off x="0" y="0"/>
+          <a:ext cx="0" cy="0"/>
+          <a:chOff x="0" y="0"/>
+          <a:chExt cx="0" cy="0"/>
+        </a:xfrm>
+      </p:grpSpPr>
+      <p:sp>
+        <p:nvSpPr>
+          <p:cNvPr id="2" name="Text 0"/>
+          <p:cNvSpPr/>
+          <p:nvPr/>
+        </p:nvSpPr>
+        <p:spPr>
+          <a:xfrm>
+            <a:off x="457200" y="365760"/>
+            <a:ext cx="11216640" cy="1280160"/>
+          </a:xfrm>
+          <a:prstGeom prst="rect">
+            <a:avLst/>
+          </a:prstGeom>
+          <a:noFill/>
+          <a:ln/>
+        </p:spPr>
+        <p:txBody>
+          <a:bodyPr wrap="square" rtlCol="0" anchor="ctr"/>
+          <a:lstStyle/>
+          <a:p>
+            <a:pPr indent="0" marL="0">
+              <a:buNone/>
+            </a:pPr>
+            <a:r>
+              <a:rPr lang="en-US" sz="2000" b="1" dirty="0">
+                <a:solidFill>
+                  <a:srgbClr val="FFFFFF"/>
+                </a:solidFill>
+              </a:rPr>
+              <a:t>Q100. Dans ses perspectives, le guide interroge notamment :</a:t>
+            </a:r>
+            <a:endParaRPr lang="en-US" sz="2000" dirty="0"/>
+          </a:p>
+        </p:txBody>
+      </p:sp>
+      <p:sp>
+        <p:nvSpPr>
+          <p:cNvPr id="3" name="Text 1"/>
+          <p:cNvSpPr/>
+          <p:nvPr/>
+        </p:nvSpPr>
+        <p:spPr>
+          <a:xfrm>
+            <a:off x="640080" y="1920240"/>
+            <a:ext cx="10728960" cy="0"/>
+          </a:xfrm>
+          <a:prstGeom prst="rect">
+            <a:avLst/>
+          </a:prstGeom>
+          <a:noFill/>
+          <a:ln/>
+        </p:spPr>
+        <p:txBody>
+          <a:bodyPr wrap="square" rtlCol="0" anchor="ctr"/>
+          <a:lstStyle/>
+          <a:p>
+            <a:pPr indent="0" marL="0">
+              <a:buNone/>
+            </a:pPr>
+            <a:r>
+              <a:rPr lang="en-US" sz="1600" dirty="0">
+                <a:solidFill>
+                  <a:srgbClr val="FFFFFF"/>
+                </a:solidFill>
+              </a:rPr>
+              <a:t>A. La suppression du PPA</a:t>
+            </a:r>
+            <a:endParaRPr lang="en-US" sz="1600" dirty="0"/>
+          </a:p>
+        </p:txBody>
+      </p:sp>
+      <p:sp>
+        <p:nvSpPr>
+          <p:cNvPr id="4" name="Text 2"/>
+          <p:cNvSpPr/>
+          <p:nvPr/>
+        </p:nvSpPr>
+        <p:spPr>
+          <a:xfrm>
+            <a:off x="640080" y="2788920"/>
+            <a:ext cx="10728960" cy="0"/>
+          </a:xfrm>
+          <a:prstGeom prst="rect">
+            <a:avLst/>
+          </a:prstGeom>
+          <a:noFill/>
+          <a:ln/>
+        </p:spPr>
+        <p:txBody>
+          <a:bodyPr wrap="square" rtlCol="0" anchor="ctr"/>
+          <a:lstStyle/>
+          <a:p>
+            <a:pPr indent="0" marL="0">
+              <a:buNone/>
+            </a:pPr>
+            <a:r>
+              <a:rPr lang="en-US" sz="1600" dirty="0">
+                <a:solidFill>
+                  <a:srgbClr val="FFFFFF"/>
+                </a:solidFill>
+              </a:rPr>
+              <a:t>B. L'idée d'un « PPA unique » et la communication alternative et améliorée</a:t>
+            </a:r>
+            <a:endParaRPr lang="en-US" sz="1600" dirty="0"/>
+          </a:p>
+        </p:txBody>
+      </p:sp>
+      <p:sp>
+        <p:nvSpPr>
+          <p:cNvPr id="5" name="Text 3"/>
+          <p:cNvSpPr/>
+          <p:nvPr/>
+        </p:nvSpPr>
+        <p:spPr>
+          <a:xfrm>
+            <a:off x="640080" y="3657600"/>
+            <a:ext cx="10728960" cy="0"/>
+          </a:xfrm>
+          <a:prstGeom prst="rect">
+            <a:avLst/>
+          </a:prstGeom>
+          <a:noFill/>
+          <a:ln/>
+        </p:spPr>
+        <p:txBody>
+          <a:bodyPr wrap="square" rtlCol="0" anchor="ctr"/>
+          <a:lstStyle/>
+          <a:p>
+            <a:pPr indent="0" marL="0">
+              <a:buNone/>
+            </a:pPr>
+            <a:r>
+              <a:rPr lang="en-US" sz="1600" dirty="0">
+                <a:solidFill>
+                  <a:srgbClr val="FFFFFF"/>
+                </a:solidFill>
+              </a:rPr>
+              <a:t>C. Le retour au papier</a:t>
+            </a:r>
+            <a:endParaRPr lang="en-US" sz="1600" dirty="0"/>
+          </a:p>
+        </p:txBody>
+      </p:sp>
+      <p:sp>
+        <p:nvSpPr>
+          <p:cNvPr id="6" name="Text 4"/>
+          <p:cNvSpPr/>
+          <p:nvPr/>
+        </p:nvSpPr>
+        <p:spPr>
+          <a:xfrm>
+            <a:off x="640080" y="4526280"/>
+            <a:ext cx="10728960" cy="0"/>
+          </a:xfrm>
+          <a:prstGeom prst="rect">
+            <a:avLst/>
+          </a:prstGeom>
+          <a:noFill/>
+          <a:ln/>
+        </p:spPr>
+        <p:txBody>
+          <a:bodyPr wrap="square" rtlCol="0" anchor="ctr"/>
+          <a:lstStyle/>
+          <a:p>
+            <a:pPr indent="0" marL="0">
+              <a:buNone/>
+            </a:pPr>
+            <a:r>
+              <a:rPr lang="en-US" sz="1600" dirty="0">
+                <a:solidFill>
+                  <a:srgbClr val="FFFFFF"/>
+                </a:solidFill>
+              </a:rPr>
+              <a:t>D. La fin du DUI</a:t>
             </a:r>
             <a:endParaRPr lang="en-US" sz="1600" dirty="0"/>
           </a:p>
@@ -31032,6 +36362,110 @@
 </p:sld>
 </file>
 
+<file path=ppt/slides/slide200.xml><?xml version="1.0" encoding="utf-8"?>
+<p:sld xmlns:a="http://schemas.openxmlformats.org/drawingml/2006/main" xmlns:r="http://schemas.openxmlformats.org/officeDocument/2006/relationships" xmlns:p="http://schemas.openxmlformats.org/presentationml/2006/main">
+  <p:cSld name="Slide 200">
+    <p:bg>
+      <p:bgPr>
+        <a:solidFill>
+          <a:srgbClr val="1B3A6B"/>
+        </a:solidFill>
+      </p:bgPr>
+    </p:bg>
+    <p:spTree>
+      <p:nvGrpSpPr>
+        <p:cNvPr id="1" name=""/>
+        <p:cNvGrpSpPr/>
+        <p:nvPr/>
+      </p:nvGrpSpPr>
+      <p:grpSpPr>
+        <a:xfrm>
+          <a:off x="0" y="0"/>
+          <a:ext cx="0" cy="0"/>
+          <a:chOff x="0" y="0"/>
+          <a:chExt cx="0" cy="0"/>
+        </a:xfrm>
+      </p:grpSpPr>
+      <p:sp>
+        <p:nvSpPr>
+          <p:cNvPr id="2" name="Text 0"/>
+          <p:cNvSpPr/>
+          <p:nvPr/>
+        </p:nvSpPr>
+        <p:spPr>
+          <a:xfrm>
+            <a:off x="457200" y="457200"/>
+            <a:ext cx="11216640" cy="0"/>
+          </a:xfrm>
+          <a:prstGeom prst="rect">
+            <a:avLst/>
+          </a:prstGeom>
+          <a:noFill/>
+          <a:ln/>
+        </p:spPr>
+        <p:txBody>
+          <a:bodyPr wrap="square" rtlCol="0" anchor="ctr"/>
+          <a:lstStyle/>
+          <a:p>
+            <a:pPr indent="0" marL="0">
+              <a:buNone/>
+            </a:pPr>
+            <a:r>
+              <a:rPr lang="en-US" sz="2600" b="1" dirty="0">
+                <a:solidFill>
+                  <a:srgbClr val="00FF99"/>
+                </a:solidFill>
+              </a:rPr>
+              <a:t>✅ Réponse : B</a:t>
+            </a:r>
+            <a:endParaRPr lang="en-US" sz="2600" dirty="0"/>
+          </a:p>
+        </p:txBody>
+      </p:sp>
+      <p:sp>
+        <p:nvSpPr>
+          <p:cNvPr id="3" name="Text 1"/>
+          <p:cNvSpPr/>
+          <p:nvPr/>
+        </p:nvSpPr>
+        <p:spPr>
+          <a:xfrm>
+            <a:off x="457200" y="1645920"/>
+            <a:ext cx="11216640" cy="0"/>
+          </a:xfrm>
+          <a:prstGeom prst="rect">
+            <a:avLst/>
+          </a:prstGeom>
+          <a:noFill/>
+          <a:ln/>
+        </p:spPr>
+        <p:txBody>
+          <a:bodyPr wrap="square" rtlCol="0" anchor="ctr"/>
+          <a:lstStyle/>
+          <a:p>
+            <a:pPr indent="0" marL="0">
+              <a:buNone/>
+            </a:pPr>
+            <a:r>
+              <a:rPr lang="en-US" sz="1600" dirty="0">
+                <a:solidFill>
+                  <a:srgbClr val="FFFFFF"/>
+                </a:solidFill>
+              </a:rPr>
+              <a:t>Perspectives : « un PPA unique ? », association de la famille, communication alternative et améliorée (CAA), tensions gestion/droits.</a:t>
+            </a:r>
+            <a:endParaRPr lang="en-US" sz="1600" dirty="0"/>
+          </a:p>
+        </p:txBody>
+      </p:sp>
+    </p:spTree>
+  </p:cSld>
+  <p:clrMapOvr>
+    <a:masterClrMapping/>
+  </p:clrMapOvr>
+</p:sld>
+</file>
+
 <file path=ppt/slides/slide21.xml><?xml version="1.0" encoding="utf-8"?>
 <p:sld xmlns:a="http://schemas.openxmlformats.org/drawingml/2006/main" xmlns:r="http://schemas.openxmlformats.org/officeDocument/2006/relationships" xmlns:p="http://schemas.openxmlformats.org/presentationml/2006/main">
   <p:cSld name="Slide 21">
@@ -35126,7 +40560,7 @@
                   <a:srgbClr val="FFFFFF"/>
                 </a:solidFill>
               </a:rPr>
-              <a:t>Éviter le jargon ; rester compréhensible pour la personne.</a:t>
+              <a:t>Éviter le jargon ; rester compréhensible.</a:t>
             </a:r>
             <a:endParaRPr lang="en-US" sz="1600" dirty="0"/>
           </a:p>
@@ -35230,7 +40664,7 @@
                   <a:srgbClr val="FFFFFF"/>
                 </a:solidFill>
               </a:rPr>
-              <a:t>A. Reformulées par l'équipe sans la personne</a:t>
+              <a:t>A. Reformulées sans la personne</a:t>
             </a:r>
             <a:endParaRPr lang="en-US" sz="1600" dirty="0"/>
           </a:p>
@@ -35758,7 +41192,7 @@
                   <a:srgbClr val="FFFFFF"/>
                 </a:solidFill>
               </a:rPr>
-              <a:t>Le P de « personnalisé » : un projet singulier.</a:t>
+              <a:t>Le « personnalisé » : un projet singulier.</a:t>
             </a:r>
             <a:endParaRPr lang="en-US" sz="1600" dirty="0"/>
           </a:p>
@@ -36918,7 +42352,7 @@
                   <a:srgbClr val="FFFFFF"/>
                 </a:solidFill>
               </a:rPr>
-              <a:t>Capacité des systèmes à échanger des données.</a:t>
+              <a:t>Capacité des systèmes à échanger des données en sécurité.</a:t>
             </a:r>
             <a:endParaRPr lang="en-US" sz="1600" dirty="0"/>
           </a:p>
@@ -39586,7 +45020,7 @@
                   <a:srgbClr val="FFFFFF"/>
                 </a:solidFill>
               </a:rPr>
-              <a:t>B. Recommandation de bonne pratique</a:t>
+              <a:t>B. Recommandation/guide de bonne pratique</a:t>
             </a:r>
             <a:endParaRPr lang="en-US" sz="1600" dirty="0"/>
           </a:p>
@@ -40534,7 +45968,7 @@
                   <a:srgbClr val="FFFFFF"/>
                 </a:solidFill>
               </a:rPr>
-              <a:t>B. Médico-social, social, ville et hôpital</a:t>
+              <a:t>B. Médico-social, social, soins de ville et hôpital</a:t>
             </a:r>
             <a:endParaRPr lang="en-US" sz="1600" dirty="0"/>
           </a:p>
@@ -41342,7 +46776,7 @@
                   <a:srgbClr val="FFFFFF"/>
                 </a:solidFill>
               </a:rPr>
-              <a:t>C'est une recommandation de bonne pratique professionnelle.</a:t>
+              <a:t>Guide de bonne pratique pour le secteur social et médico-social.</a:t>
             </a:r>
             <a:endParaRPr lang="en-US" sz="1600" dirty="0"/>
           </a:p>
@@ -42534,7 +47968,7 @@
                   <a:srgbClr val="FFFFFF"/>
                 </a:solidFill>
               </a:rPr>
-              <a:t>B. Un droit d'information et d'accès</a:t>
+              <a:t>B. Un droit d'information, d'accès, d'opposition et de rectification</a:t>
             </a:r>
             <a:endParaRPr lang="en-US" sz="1600" dirty="0"/>
           </a:p>
@@ -42710,7 +48144,7 @@
                   <a:srgbClr val="FFFFFF"/>
                 </a:solidFill>
               </a:rPr>
-              <a:t>Droits d'information et d'accès de la personne.</a:t>
+              <a:t>Droits d'information, d'accès, d'opposition et de rectification.</a:t>
             </a:r>
             <a:endParaRPr lang="en-US" sz="1600" dirty="0"/>
           </a:p>
@@ -42990,7 +48424,7 @@
                   <a:srgbClr val="FFFFFF"/>
                 </a:solidFill>
               </a:rPr>
-              <a:t>Q5. Date de publication du guide ?</a:t>
+              <a:t>Q5. Date de validation du guide ?</a:t>
             </a:r>
             <a:endParaRPr lang="en-US" sz="2000" dirty="0"/>
           </a:p>
@@ -43026,7 +48460,7 @@
                   <a:srgbClr val="FFFFFF"/>
                 </a:solidFill>
               </a:rPr>
-              <a:t>A. 24 juin 2026</a:t>
+              <a:t>A. 12 mai 2026</a:t>
             </a:r>
             <a:endParaRPr lang="en-US" sz="1600" dirty="0"/>
           </a:p>
@@ -43098,7 +48532,7 @@
                   <a:srgbClr val="FFFFFF"/>
                 </a:solidFill>
               </a:rPr>
-              <a:t>C. 12 mai 2025</a:t>
+              <a:t>C. 24 décembre 2025</a:t>
             </a:r>
             <a:endParaRPr lang="en-US" sz="1600" dirty="0"/>
           </a:p>
@@ -44570,7 +50004,7 @@
                   <a:srgbClr val="FFFFFF"/>
                 </a:solidFill>
               </a:rPr>
-              <a:t>Q50. Une AIPD (analyse d'impact) est pertinente quand :</a:t>
+              <a:t>Q50. Une AIPD est pertinente quand :</a:t>
             </a:r>
             <a:endParaRPr lang="en-US" sz="2000" dirty="0"/>
           </a:p>
